--- a/_wp移行素材/★引継ぎ資料/★ASPATH_サイト運用マニュアル_最応用編.pptx
+++ b/_wp移行素材/★引継ぎ資料/★ASPATH_サイト運用マニュアル_最応用編.pptx
@@ -2103,7 +2103,7 @@
     <p:bg>
       <p:bgPr>
         <a:solidFill>
-          <a:srgbClr val="264653"/>
+          <a:srgbClr val="F4E9D8"/>
         </a:solidFill>
       </p:bgPr>
     </p:bg>
@@ -2123,30 +2123,94 @@
       </p:grpSpPr>
       <p:sp>
         <p:nvSpPr>
-          <p:cNvPr id="2" name="Text 0"/>
-          <p:cNvSpPr txBox="1"/>
-          <p:nvPr/>
-        </p:nvSpPr>
-        <p:spPr>
-          <a:xfrm>
-            <a:off x="822960" y="1325880"/>
-            <a:ext cx="7315200" cy="457200"/>
-          </a:xfrm>
-          <a:prstGeom prst="rect">
-            <a:avLst/>
-          </a:prstGeom>
-          <a:noFill/>
-          <a:ln/>
-        </p:spPr>
-        <p:txBody>
-          <a:bodyPr wrap="square" lIns="0" tIns="0" rIns="0" bIns="0" rtlCol="0" anchor="ctr"/>
-          <a:lstStyle/>
-          <a:p>
-            <a:pPr indent="0" marL="0">
-              <a:buNone/>
-            </a:pPr>
-            <a:r>
-              <a:rPr lang="en-US" sz="1700" b="1" spc="600" kern="0" dirty="0">
+          <p:cNvPr id="2" name="Shape 0"/>
+          <p:cNvSpPr/>
+          <p:nvPr/>
+        </p:nvSpPr>
+        <p:spPr>
+          <a:xfrm>
+            <a:off x="0" y="0"/>
+            <a:ext cx="12198096" cy="146304"/>
+          </a:xfrm>
+          <a:prstGeom prst="rect">
+            <a:avLst/>
+          </a:prstGeom>
+          <a:solidFill>
+            <a:srgbClr val="264653"/>
+          </a:solidFill>
+          <a:ln/>
+        </p:spPr>
+      </p:sp>
+      <p:sp>
+        <p:nvSpPr>
+          <p:cNvPr id="3" name="Shape 1"/>
+          <p:cNvSpPr/>
+          <p:nvPr/>
+        </p:nvSpPr>
+        <p:spPr>
+          <a:xfrm>
+            <a:off x="0" y="6711696"/>
+            <a:ext cx="12198096" cy="146304"/>
+          </a:xfrm>
+          <a:prstGeom prst="rect">
+            <a:avLst/>
+          </a:prstGeom>
+          <a:solidFill>
+            <a:srgbClr val="F4A261"/>
+          </a:solidFill>
+          <a:ln/>
+        </p:spPr>
+      </p:sp>
+      <p:pic>
+        <p:nvPicPr>
+          <p:cNvPr id="4" name="Image 0" descr="/sessions/compassionate-sweet-heisenberg/mnt/dev-aspath-life-main/tools/assets/logo-deck.png">    </p:cNvPr>
+          <p:cNvPicPr>
+            <a:picLocks noChangeAspect="1"/>
+          </p:cNvPicPr>
+          <p:nvPr/>
+        </p:nvPicPr>
+        <p:blipFill>
+          <a:blip r:embed="rId1"/>
+          <a:stretch>
+            <a:fillRect/>
+          </a:stretch>
+        </p:blipFill>
+        <p:spPr>
+          <a:xfrm>
+            <a:off x="1051560" y="1874520"/>
+            <a:ext cx="2320246" cy="2834640"/>
+          </a:xfrm>
+          <a:prstGeom prst="rect">
+            <a:avLst/>
+          </a:prstGeom>
+        </p:spPr>
+      </p:pic>
+      <p:sp>
+        <p:nvSpPr>
+          <p:cNvPr id="5" name="Text 2"/>
+          <p:cNvSpPr txBox="1"/>
+          <p:nvPr/>
+        </p:nvSpPr>
+        <p:spPr>
+          <a:xfrm>
+            <a:off x="4892040" y="1572768"/>
+            <a:ext cx="6675120" cy="384048"/>
+          </a:xfrm>
+          <a:prstGeom prst="rect">
+            <a:avLst/>
+          </a:prstGeom>
+          <a:noFill/>
+          <a:ln/>
+        </p:spPr>
+        <p:txBody>
+          <a:bodyPr wrap="square" lIns="0" tIns="0" rIns="0" bIns="0" rtlCol="0" anchor="ctr"/>
+          <a:lstStyle/>
+          <a:p>
+            <a:pPr indent="0" marL="0">
+              <a:buNone/>
+            </a:pPr>
+            <a:r>
+              <a:rPr lang="en-US" sz="1500" b="1" spc="600" kern="0" dirty="0">
                 <a:solidFill>
                   <a:srgbClr val="F4A261"/>
                 </a:solidFill>
@@ -2156,38 +2220,41 @@
               </a:rPr>
               <a:t>ASPATH</a:t>
             </a:r>
-            <a:endParaRPr lang="en-US" sz="1700" dirty="0"/>
-          </a:p>
-        </p:txBody>
-      </p:sp>
-      <p:sp>
-        <p:nvSpPr>
-          <p:cNvPr id="3" name="Text 1"/>
-          <p:cNvSpPr txBox="1"/>
-          <p:nvPr/>
-        </p:nvSpPr>
-        <p:spPr>
-          <a:xfrm>
-            <a:off x="822960" y="1874520"/>
-            <a:ext cx="10058400" cy="868680"/>
-          </a:xfrm>
-          <a:prstGeom prst="rect">
-            <a:avLst/>
-          </a:prstGeom>
-          <a:noFill/>
-          <a:ln/>
-        </p:spPr>
-        <p:txBody>
-          <a:bodyPr wrap="square" lIns="0" tIns="0" rIns="0" bIns="0" rtlCol="0" anchor="ctr"/>
-          <a:lstStyle/>
-          <a:p>
-            <a:pPr indent="0" marL="0">
-              <a:buNone/>
-            </a:pPr>
-            <a:r>
-              <a:rPr lang="en-US" sz="4200" b="1" dirty="0">
-                <a:solidFill>
-                  <a:srgbClr val="FFFFFF"/>
+            <a:endParaRPr lang="en-US" sz="1500" dirty="0"/>
+          </a:p>
+        </p:txBody>
+      </p:sp>
+      <p:sp>
+        <p:nvSpPr>
+          <p:cNvPr id="6" name="Text 3"/>
+          <p:cNvSpPr txBox="1"/>
+          <p:nvPr/>
+        </p:nvSpPr>
+        <p:spPr>
+          <a:xfrm>
+            <a:off x="4892040" y="1993392"/>
+            <a:ext cx="6675120" cy="914400"/>
+          </a:xfrm>
+          <a:prstGeom prst="rect">
+            <a:avLst/>
+          </a:prstGeom>
+          <a:noFill/>
+          <a:ln/>
+        </p:spPr>
+        <p:txBody>
+          <a:bodyPr wrap="square" lIns="0" tIns="0" rIns="0" bIns="0" rtlCol="0" anchor="ctr"/>
+          <a:lstStyle/>
+          <a:p>
+            <a:pPr indent="0" marL="0">
+              <a:lnSpc>
+                <a:spcPct val="120000"/>
+              </a:lnSpc>
+              <a:buNone/>
+            </a:pPr>
+            <a:r>
+              <a:rPr lang="en-US" sz="3600" b="1" dirty="0">
+                <a:solidFill>
+                  <a:srgbClr val="264653"/>
                 </a:solidFill>
                 <a:latin typeface="Meiryo" pitchFamily="34" charset="0"/>
                 <a:ea typeface="Meiryo" pitchFamily="34" charset="-122"/>
@@ -2195,20 +2262,20 @@
               </a:rPr>
               <a:t>サイト運用マニュアル</a:t>
             </a:r>
-            <a:endParaRPr lang="en-US" sz="4200" dirty="0"/>
-          </a:p>
-        </p:txBody>
-      </p:sp>
-      <p:sp>
-        <p:nvSpPr>
-          <p:cNvPr id="4" name="Shape 2"/>
+            <a:endParaRPr lang="en-US" sz="3600" dirty="0"/>
+          </a:p>
+        </p:txBody>
+      </p:sp>
+      <p:sp>
+        <p:nvSpPr>
+          <p:cNvPr id="7" name="Shape 4"/>
           <p:cNvSpPr/>
           <p:nvPr/>
         </p:nvSpPr>
         <p:spPr>
           <a:xfrm>
-            <a:off x="822960" y="2926080"/>
-            <a:ext cx="2286000" cy="585216"/>
+            <a:off x="4892040" y="2962656"/>
+            <a:ext cx="2286000" cy="548640"/>
           </a:xfrm>
           <a:prstGeom prst="roundRect">
             <a:avLst>
@@ -2223,14 +2290,14 @@
       </p:sp>
       <p:sp>
         <p:nvSpPr>
-          <p:cNvPr id="5" name="Text 3"/>
-          <p:cNvSpPr txBox="1"/>
-          <p:nvPr/>
-        </p:nvSpPr>
-        <p:spPr>
-          <a:xfrm>
-            <a:off x="822960" y="2926080"/>
-            <a:ext cx="2286000" cy="585216"/>
+          <p:cNvPr id="8" name="Text 5"/>
+          <p:cNvSpPr txBox="1"/>
+          <p:nvPr/>
+        </p:nvSpPr>
+        <p:spPr>
+          <a:xfrm>
+            <a:off x="4892040" y="2962656"/>
+            <a:ext cx="2286000" cy="548640"/>
           </a:xfrm>
           <a:prstGeom prst="rect">
             <a:avLst/>
@@ -2246,7 +2313,7 @@
               <a:buNone/>
             </a:pPr>
             <a:r>
-              <a:rPr lang="en-US" sz="1800" b="1" dirty="0">
+              <a:rPr lang="en-US" sz="1700" b="1" dirty="0">
                 <a:solidFill>
                   <a:srgbClr val="FFFFFF"/>
                 </a:solidFill>
@@ -2256,38 +2323,41 @@
               </a:rPr>
               <a:t>最 応 用 編</a:t>
             </a:r>
-            <a:endParaRPr lang="en-US" sz="1800" dirty="0"/>
-          </a:p>
-        </p:txBody>
-      </p:sp>
-      <p:sp>
-        <p:nvSpPr>
-          <p:cNvPr id="6" name="Text 4"/>
-          <p:cNvSpPr txBox="1"/>
-          <p:nvPr/>
-        </p:nvSpPr>
-        <p:spPr>
-          <a:xfrm>
-            <a:off x="822960" y="3794760"/>
-            <a:ext cx="10058400" cy="411480"/>
-          </a:xfrm>
-          <a:prstGeom prst="rect">
-            <a:avLst/>
-          </a:prstGeom>
-          <a:noFill/>
-          <a:ln/>
-        </p:spPr>
-        <p:txBody>
-          <a:bodyPr wrap="square" lIns="0" tIns="0" rIns="0" bIns="0" rtlCol="0" anchor="ctr"/>
-          <a:lstStyle/>
-          <a:p>
-            <a:pPr indent="0" marL="0">
-              <a:buNone/>
-            </a:pPr>
-            <a:r>
-              <a:rPr lang="en-US" sz="1600" dirty="0">
-                <a:solidFill>
-                  <a:srgbClr val="CFE0E4"/>
+            <a:endParaRPr lang="en-US" sz="1700" dirty="0"/>
+          </a:p>
+        </p:txBody>
+      </p:sp>
+      <p:sp>
+        <p:nvSpPr>
+          <p:cNvPr id="9" name="Text 6"/>
+          <p:cNvSpPr txBox="1"/>
+          <p:nvPr/>
+        </p:nvSpPr>
+        <p:spPr>
+          <a:xfrm>
+            <a:off x="4892040" y="3749040"/>
+            <a:ext cx="6675120" cy="548640"/>
+          </a:xfrm>
+          <a:prstGeom prst="rect">
+            <a:avLst/>
+          </a:prstGeom>
+          <a:noFill/>
+          <a:ln/>
+        </p:spPr>
+        <p:txBody>
+          <a:bodyPr wrap="square" lIns="0" tIns="0" rIns="0" bIns="0" rtlCol="0" anchor="ctr"/>
+          <a:lstStyle/>
+          <a:p>
+            <a:pPr indent="0" marL="0">
+              <a:lnSpc>
+                <a:spcPct val="130000"/>
+              </a:lnSpc>
+              <a:buNone/>
+            </a:pPr>
+            <a:r>
+              <a:rPr lang="en-US" sz="1500" dirty="0">
+                <a:solidFill>
+                  <a:srgbClr val="52707A"/>
                 </a:solidFill>
                 <a:latin typeface="Meiryo" pitchFamily="34" charset="0"/>
                 <a:ea typeface="Meiryo" pitchFamily="34" charset="-122"/>
@@ -2295,38 +2365,19 @@
               </a:rPr>
               <a:t>公開したあとの点検と、直し方</a:t>
             </a:r>
-            <a:endParaRPr lang="en-US" sz="1600" dirty="0"/>
-          </a:p>
-        </p:txBody>
-      </p:sp>
-      <p:sp>
-        <p:nvSpPr>
-          <p:cNvPr id="7" name="Text 5"/>
-          <p:cNvSpPr txBox="1"/>
-          <p:nvPr/>
-        </p:nvSpPr>
-        <p:spPr>
-          <a:xfrm>
-            <a:off x="822960" y="4343400"/>
-            <a:ext cx="10058400" cy="411480"/>
-          </a:xfrm>
-          <a:prstGeom prst="rect">
-            <a:avLst/>
-          </a:prstGeom>
-          <a:noFill/>
-          <a:ln/>
-        </p:spPr>
-        <p:txBody>
-          <a:bodyPr wrap="square" lIns="0" tIns="0" rIns="0" bIns="0" rtlCol="0" anchor="ctr"/>
-          <a:lstStyle/>
-          <a:p>
-            <a:pPr indent="0" marL="0">
-              <a:buNone/>
-            </a:pPr>
-            <a:r>
-              <a:rPr lang="en-US" sz="1300" dirty="0">
-                <a:solidFill>
-                  <a:srgbClr val="9FBAC1"/>
+            <a:endParaRPr lang="en-US" sz="1500" dirty="0"/>
+          </a:p>
+          <a:p>
+            <a:pPr indent="0" marL="0">
+              <a:lnSpc>
+                <a:spcPct val="130000"/>
+              </a:lnSpc>
+              <a:buNone/>
+            </a:pPr>
+            <a:r>
+              <a:rPr lang="en-US" sz="1500" dirty="0">
+                <a:solidFill>
+                  <a:srgbClr val="52707A"/>
                 </a:solidFill>
                 <a:latin typeface="Meiryo" pitchFamily="34" charset="0"/>
                 <a:ea typeface="Meiryo" pitchFamily="34" charset="-122"/>
@@ -2334,46 +2385,144 @@
               </a:rPr>
               <a:t>サイトは作って終わりではありません。壊れていないかを定期的に確かめる、その方法をまとめました。</a:t>
             </a:r>
-            <a:endParaRPr lang="en-US" sz="1300" dirty="0"/>
-          </a:p>
-        </p:txBody>
-      </p:sp>
-      <p:sp>
-        <p:nvSpPr>
-          <p:cNvPr id="8" name="Text 6"/>
-          <p:cNvSpPr txBox="1"/>
-          <p:nvPr/>
-        </p:nvSpPr>
-        <p:spPr>
-          <a:xfrm>
-            <a:off x="822960" y="5760720"/>
-            <a:ext cx="7315200" cy="365760"/>
-          </a:xfrm>
-          <a:prstGeom prst="rect">
-            <a:avLst/>
-          </a:prstGeom>
-          <a:noFill/>
-          <a:ln/>
-        </p:spPr>
-        <p:txBody>
-          <a:bodyPr wrap="square" lIns="0" tIns="0" rIns="0" bIns="0" rtlCol="0" anchor="ctr"/>
-          <a:lstStyle/>
-          <a:p>
-            <a:pPr indent="0" marL="0">
-              <a:buNone/>
-            </a:pPr>
-            <a:r>
-              <a:rPr lang="en-US" sz="1200" dirty="0">
-                <a:solidFill>
-                  <a:srgbClr val="9FBAC1"/>
-                </a:solidFill>
-                <a:latin typeface="Meiryo" pitchFamily="34" charset="0"/>
-                <a:ea typeface="Meiryo" pitchFamily="34" charset="-122"/>
-                <a:cs typeface="Meiryo" pitchFamily="34" charset="-120"/>
-              </a:rPr>
-              <a:t>2026年9月　ASPATH 様　ご納品資料</a:t>
-            </a:r>
-            <a:endParaRPr lang="en-US" sz="1200" dirty="0"/>
+            <a:endParaRPr lang="en-US" sz="1500" dirty="0"/>
+          </a:p>
+        </p:txBody>
+      </p:sp>
+      <p:sp>
+        <p:nvSpPr>
+          <p:cNvPr id="10" name="Shape 7"/>
+          <p:cNvSpPr/>
+          <p:nvPr/>
+        </p:nvSpPr>
+        <p:spPr>
+          <a:xfrm>
+            <a:off x="4892040" y="4736592"/>
+            <a:ext cx="1828800" cy="18288"/>
+          </a:xfrm>
+          <a:prstGeom prst="rect">
+            <a:avLst/>
+          </a:prstGeom>
+          <a:solidFill>
+            <a:srgbClr val="F4A261"/>
+          </a:solidFill>
+          <a:ln/>
+        </p:spPr>
+      </p:sp>
+      <p:sp>
+        <p:nvSpPr>
+          <p:cNvPr id="11" name="Text 8"/>
+          <p:cNvSpPr txBox="1"/>
+          <p:nvPr/>
+        </p:nvSpPr>
+        <p:spPr>
+          <a:xfrm>
+            <a:off x="4892040" y="4864608"/>
+            <a:ext cx="6675120" cy="292608"/>
+          </a:xfrm>
+          <a:prstGeom prst="rect">
+            <a:avLst/>
+          </a:prstGeom>
+          <a:noFill/>
+          <a:ln/>
+        </p:spPr>
+        <p:txBody>
+          <a:bodyPr wrap="square" lIns="0" tIns="0" rIns="0" bIns="0" rtlCol="0" anchor="ctr"/>
+          <a:lstStyle/>
+          <a:p>
+            <a:pPr indent="0" marL="0">
+              <a:buNone/>
+            </a:pPr>
+            <a:r>
+              <a:rPr lang="en-US" sz="1250" b="1" dirty="0">
+                <a:solidFill>
+                  <a:srgbClr val="264653"/>
+                </a:solidFill>
+                <a:latin typeface="Meiryo" pitchFamily="34" charset="0"/>
+                <a:ea typeface="Meiryo" pitchFamily="34" charset="-122"/>
+                <a:cs typeface="Meiryo" pitchFamily="34" charset="-120"/>
+              </a:rPr>
+              <a:t>鹿児島のパーキンソン病専門トレーニングスタジオ</a:t>
+            </a:r>
+            <a:endParaRPr lang="en-US" sz="1250" dirty="0"/>
+          </a:p>
+        </p:txBody>
+      </p:sp>
+      <p:sp>
+        <p:nvSpPr>
+          <p:cNvPr id="12" name="Text 9"/>
+          <p:cNvSpPr txBox="1"/>
+          <p:nvPr/>
+        </p:nvSpPr>
+        <p:spPr>
+          <a:xfrm>
+            <a:off x="4892040" y="5193792"/>
+            <a:ext cx="6675120" cy="274320"/>
+          </a:xfrm>
+          <a:prstGeom prst="rect">
+            <a:avLst/>
+          </a:prstGeom>
+          <a:noFill/>
+          <a:ln/>
+        </p:spPr>
+        <p:txBody>
+          <a:bodyPr wrap="square" lIns="0" tIns="0" rIns="0" bIns="0" rtlCol="0" anchor="ctr"/>
+          <a:lstStyle/>
+          <a:p>
+            <a:pPr indent="0" marL="0">
+              <a:buNone/>
+            </a:pPr>
+            <a:r>
+              <a:rPr lang="en-US" sz="1150" dirty="0">
+                <a:solidFill>
+                  <a:srgbClr val="52707A"/>
+                </a:solidFill>
+                <a:latin typeface="Meiryo" pitchFamily="34" charset="0"/>
+                <a:ea typeface="Meiryo" pitchFamily="34" charset="-122"/>
+                <a:cs typeface="Meiryo" pitchFamily="34" charset="-120"/>
+              </a:rPr>
+              <a:t>動くことを楽しむ。明日につながる。</a:t>
+            </a:r>
+            <a:endParaRPr lang="en-US" sz="1150" dirty="0"/>
+          </a:p>
+        </p:txBody>
+      </p:sp>
+      <p:sp>
+        <p:nvSpPr>
+          <p:cNvPr id="13" name="Text 10"/>
+          <p:cNvSpPr txBox="1"/>
+          <p:nvPr/>
+        </p:nvSpPr>
+        <p:spPr>
+          <a:xfrm>
+            <a:off x="4892040" y="5596128"/>
+            <a:ext cx="6675120" cy="274320"/>
+          </a:xfrm>
+          <a:prstGeom prst="rect">
+            <a:avLst/>
+          </a:prstGeom>
+          <a:noFill/>
+          <a:ln/>
+        </p:spPr>
+        <p:txBody>
+          <a:bodyPr wrap="square" lIns="0" tIns="0" rIns="0" bIns="0" rtlCol="0" anchor="ctr"/>
+          <a:lstStyle/>
+          <a:p>
+            <a:pPr indent="0" marL="0">
+              <a:buNone/>
+            </a:pPr>
+            <a:r>
+              <a:rPr lang="en-US" sz="1050" dirty="0">
+                <a:solidFill>
+                  <a:srgbClr val="8A9CA2"/>
+                </a:solidFill>
+                <a:latin typeface="Meiryo" pitchFamily="34" charset="0"/>
+                <a:ea typeface="Meiryo" pitchFamily="34" charset="-122"/>
+                <a:cs typeface="Meiryo" pitchFamily="34" charset="-120"/>
+              </a:rPr>
+              <a:t>aspath-life.com　／　2026年9月　ASPATH 様　ご納品資料</a:t>
+            </a:r>
+            <a:endParaRPr lang="en-US" sz="1050" dirty="0"/>
           </a:p>
         </p:txBody>
       </p:sp>
@@ -2409,9 +2558,72 @@
           <a:chExt cx="0" cy="0"/>
         </a:xfrm>
       </p:grpSpPr>
-      <p:sp>
-        <p:nvSpPr>
-          <p:cNvPr id="2" name="Text 0"/>
+      <p:pic>
+        <p:nvPicPr>
+          <p:cNvPr id="2" name="Image 0" descr="/sessions/compassionate-sweet-heisenberg/mnt/dev-aspath-life-main/tools/assets/logo-deck.png">    </p:cNvPr>
+          <p:cNvPicPr>
+            <a:picLocks noChangeAspect="1"/>
+          </p:cNvPicPr>
+          <p:nvPr/>
+        </p:nvPicPr>
+        <p:blipFill>
+          <a:blip r:embed="rId1"/>
+          <a:stretch>
+            <a:fillRect/>
+          </a:stretch>
+        </p:blipFill>
+        <p:spPr>
+          <a:xfrm>
+            <a:off x="11458173" y="109728"/>
+            <a:ext cx="209571" cy="256032"/>
+          </a:xfrm>
+          <a:prstGeom prst="rect">
+            <a:avLst/>
+          </a:prstGeom>
+        </p:spPr>
+      </p:pic>
+      <p:sp>
+        <p:nvSpPr>
+          <p:cNvPr id="3" name="Text 0"/>
+          <p:cNvSpPr txBox="1"/>
+          <p:nvPr/>
+        </p:nvSpPr>
+        <p:spPr>
+          <a:xfrm>
+            <a:off x="8623533" y="128016"/>
+            <a:ext cx="2743200" cy="237744"/>
+          </a:xfrm>
+          <a:prstGeom prst="rect">
+            <a:avLst/>
+          </a:prstGeom>
+          <a:noFill/>
+          <a:ln/>
+        </p:spPr>
+        <p:txBody>
+          <a:bodyPr wrap="square" lIns="0" tIns="0" rIns="0" bIns="0" rtlCol="0" anchor="ctr"/>
+          <a:lstStyle/>
+          <a:p>
+            <a:pPr algn="r" indent="0" marL="0">
+              <a:buNone/>
+            </a:pPr>
+            <a:r>
+              <a:rPr lang="en-US" sz="750" dirty="0">
+                <a:solidFill>
+                  <a:srgbClr val="97A9AF"/>
+                </a:solidFill>
+                <a:latin typeface="Meiryo" pitchFamily="34" charset="0"/>
+                <a:ea typeface="Meiryo" pitchFamily="34" charset="-122"/>
+                <a:cs typeface="Meiryo" pitchFamily="34" charset="-120"/>
+              </a:rPr>
+              <a:t>鹿児島のパーキンソン病専門トレーニングスタジオ</a:t>
+            </a:r>
+            <a:endParaRPr lang="en-US" sz="750" dirty="0"/>
+          </a:p>
+        </p:txBody>
+      </p:sp>
+      <p:sp>
+        <p:nvSpPr>
+          <p:cNvPr id="4" name="Text 1"/>
           <p:cNvSpPr txBox="1"/>
           <p:nvPr/>
         </p:nvSpPr>
@@ -2450,7 +2662,7 @@
       </p:sp>
       <p:sp>
         <p:nvSpPr>
-          <p:cNvPr id="3" name="Text 1"/>
+          <p:cNvPr id="5" name="Text 2"/>
           <p:cNvSpPr txBox="1"/>
           <p:nvPr/>
         </p:nvSpPr>
@@ -2489,7 +2701,7 @@
       </p:sp>
       <p:sp>
         <p:nvSpPr>
-          <p:cNvPr id="4" name="Text 2"/>
+          <p:cNvPr id="6" name="Text 3"/>
           <p:cNvSpPr txBox="1"/>
           <p:nvPr/>
         </p:nvSpPr>
@@ -2528,7 +2740,7 @@
       </p:sp>
       <p:sp>
         <p:nvSpPr>
-          <p:cNvPr id="5" name="Shape 3"/>
+          <p:cNvPr id="7" name="Shape 4"/>
           <p:cNvSpPr/>
           <p:nvPr/>
         </p:nvSpPr>
@@ -2555,7 +2767,7 @@
       </p:sp>
       <p:sp>
         <p:nvSpPr>
-          <p:cNvPr id="6" name="Shape 4"/>
+          <p:cNvPr id="8" name="Shape 5"/>
           <p:cNvSpPr/>
           <p:nvPr/>
         </p:nvSpPr>
@@ -2577,7 +2789,7 @@
       </p:sp>
       <p:sp>
         <p:nvSpPr>
-          <p:cNvPr id="7" name="Text 5"/>
+          <p:cNvPr id="9" name="Text 6"/>
           <p:cNvSpPr txBox="1"/>
           <p:nvPr/>
         </p:nvSpPr>
@@ -2616,7 +2828,7 @@
       </p:sp>
       <p:sp>
         <p:nvSpPr>
-          <p:cNvPr id="8" name="Text 6"/>
+          <p:cNvPr id="10" name="Text 7"/>
           <p:cNvSpPr txBox="1"/>
           <p:nvPr/>
         </p:nvSpPr>
@@ -2767,7 +2979,7 @@
       </p:sp>
       <p:sp>
         <p:nvSpPr>
-          <p:cNvPr id="9" name="Shape 7"/>
+          <p:cNvPr id="11" name="Shape 8"/>
           <p:cNvSpPr/>
           <p:nvPr/>
         </p:nvSpPr>
@@ -2794,7 +3006,7 @@
       </p:sp>
       <p:sp>
         <p:nvSpPr>
-          <p:cNvPr id="10" name="Shape 8"/>
+          <p:cNvPr id="12" name="Shape 9"/>
           <p:cNvSpPr/>
           <p:nvPr/>
         </p:nvSpPr>
@@ -2816,7 +3028,7 @@
       </p:sp>
       <p:sp>
         <p:nvSpPr>
-          <p:cNvPr id="11" name="Text 9"/>
+          <p:cNvPr id="13" name="Text 10"/>
           <p:cNvSpPr txBox="1"/>
           <p:nvPr/>
         </p:nvSpPr>
@@ -2855,7 +3067,7 @@
       </p:sp>
       <p:sp>
         <p:nvSpPr>
-          <p:cNvPr id="12" name="Text 10"/>
+          <p:cNvPr id="14" name="Text 11"/>
           <p:cNvSpPr txBox="1"/>
           <p:nvPr/>
         </p:nvSpPr>
@@ -3015,7 +3227,7 @@
       </p:sp>
       <p:sp>
         <p:nvSpPr>
-          <p:cNvPr id="13" name="Shape 11"/>
+          <p:cNvPr id="15" name="Shape 12"/>
           <p:cNvSpPr/>
           <p:nvPr/>
         </p:nvSpPr>
@@ -3042,7 +3254,7 @@
       </p:sp>
       <p:sp>
         <p:nvSpPr>
-          <p:cNvPr id="14" name="Shape 12"/>
+          <p:cNvPr id="16" name="Shape 13"/>
           <p:cNvSpPr/>
           <p:nvPr/>
         </p:nvSpPr>
@@ -3062,7 +3274,7 @@
       </p:sp>
       <p:sp>
         <p:nvSpPr>
-          <p:cNvPr id="15" name="Text 13"/>
+          <p:cNvPr id="17" name="Text 14"/>
           <p:cNvSpPr txBox="1"/>
           <p:nvPr/>
         </p:nvSpPr>
@@ -3101,7 +3313,7 @@
       </p:sp>
       <p:sp>
         <p:nvSpPr>
-          <p:cNvPr id="16" name="Text 14"/>
+          <p:cNvPr id="18" name="Text 15"/>
           <p:cNvSpPr txBox="1"/>
           <p:nvPr/>
         </p:nvSpPr>
@@ -3163,7 +3375,7 @@
       </p:sp>
       <p:sp>
         <p:nvSpPr>
-          <p:cNvPr id="17" name="Shape 15"/>
+          <p:cNvPr id="19" name="Shape 16"/>
           <p:cNvSpPr/>
           <p:nvPr/>
         </p:nvSpPr>
@@ -3190,7 +3402,7 @@
       </p:sp>
       <p:sp>
         <p:nvSpPr>
-          <p:cNvPr id="18" name="Shape 16"/>
+          <p:cNvPr id="20" name="Shape 17"/>
           <p:cNvSpPr/>
           <p:nvPr/>
         </p:nvSpPr>
@@ -3210,7 +3422,7 @@
       </p:sp>
       <p:sp>
         <p:nvSpPr>
-          <p:cNvPr id="19" name="Text 17"/>
+          <p:cNvPr id="21" name="Text 18"/>
           <p:cNvSpPr txBox="1"/>
           <p:nvPr/>
         </p:nvSpPr>
@@ -3249,7 +3461,7 @@
       </p:sp>
       <p:sp>
         <p:nvSpPr>
-          <p:cNvPr id="20" name="Text 18"/>
+          <p:cNvPr id="22" name="Text 19"/>
           <p:cNvSpPr txBox="1"/>
           <p:nvPr/>
         </p:nvSpPr>
@@ -3341,9 +3553,72 @@
           <a:chExt cx="0" cy="0"/>
         </a:xfrm>
       </p:grpSpPr>
-      <p:sp>
-        <p:nvSpPr>
-          <p:cNvPr id="2" name="Text 0"/>
+      <p:pic>
+        <p:nvPicPr>
+          <p:cNvPr id="2" name="Image 0" descr="/sessions/compassionate-sweet-heisenberg/mnt/dev-aspath-life-main/tools/assets/logo-deck.png">    </p:cNvPr>
+          <p:cNvPicPr>
+            <a:picLocks noChangeAspect="1"/>
+          </p:cNvPicPr>
+          <p:nvPr/>
+        </p:nvPicPr>
+        <p:blipFill>
+          <a:blip r:embed="rId1"/>
+          <a:stretch>
+            <a:fillRect/>
+          </a:stretch>
+        </p:blipFill>
+        <p:spPr>
+          <a:xfrm>
+            <a:off x="11458173" y="109728"/>
+            <a:ext cx="209571" cy="256032"/>
+          </a:xfrm>
+          <a:prstGeom prst="rect">
+            <a:avLst/>
+          </a:prstGeom>
+        </p:spPr>
+      </p:pic>
+      <p:sp>
+        <p:nvSpPr>
+          <p:cNvPr id="3" name="Text 0"/>
+          <p:cNvSpPr txBox="1"/>
+          <p:nvPr/>
+        </p:nvSpPr>
+        <p:spPr>
+          <a:xfrm>
+            <a:off x="8623533" y="128016"/>
+            <a:ext cx="2743200" cy="237744"/>
+          </a:xfrm>
+          <a:prstGeom prst="rect">
+            <a:avLst/>
+          </a:prstGeom>
+          <a:noFill/>
+          <a:ln/>
+        </p:spPr>
+        <p:txBody>
+          <a:bodyPr wrap="square" lIns="0" tIns="0" rIns="0" bIns="0" rtlCol="0" anchor="ctr"/>
+          <a:lstStyle/>
+          <a:p>
+            <a:pPr algn="r" indent="0" marL="0">
+              <a:buNone/>
+            </a:pPr>
+            <a:r>
+              <a:rPr lang="en-US" sz="750" dirty="0">
+                <a:solidFill>
+                  <a:srgbClr val="97A9AF"/>
+                </a:solidFill>
+                <a:latin typeface="Meiryo" pitchFamily="34" charset="0"/>
+                <a:ea typeface="Meiryo" pitchFamily="34" charset="-122"/>
+                <a:cs typeface="Meiryo" pitchFamily="34" charset="-120"/>
+              </a:rPr>
+              <a:t>鹿児島のパーキンソン病専門トレーニングスタジオ</a:t>
+            </a:r>
+            <a:endParaRPr lang="en-US" sz="750" dirty="0"/>
+          </a:p>
+        </p:txBody>
+      </p:sp>
+      <p:sp>
+        <p:nvSpPr>
+          <p:cNvPr id="4" name="Text 1"/>
           <p:cNvSpPr txBox="1"/>
           <p:nvPr/>
         </p:nvSpPr>
@@ -3382,7 +3657,7 @@
       </p:sp>
       <p:sp>
         <p:nvSpPr>
-          <p:cNvPr id="3" name="Text 1"/>
+          <p:cNvPr id="5" name="Text 2"/>
           <p:cNvSpPr txBox="1"/>
           <p:nvPr/>
         </p:nvSpPr>
@@ -3421,7 +3696,7 @@
       </p:sp>
       <p:sp>
         <p:nvSpPr>
-          <p:cNvPr id="4" name="Text 2"/>
+          <p:cNvPr id="6" name="Text 3"/>
           <p:cNvSpPr txBox="1"/>
           <p:nvPr/>
         </p:nvSpPr>
@@ -3460,7 +3735,7 @@
       </p:sp>
       <p:sp>
         <p:nvSpPr>
-          <p:cNvPr id="5" name="Shape 3"/>
+          <p:cNvPr id="7" name="Shape 4"/>
           <p:cNvSpPr/>
           <p:nvPr/>
         </p:nvSpPr>
@@ -3487,7 +3762,7 @@
       </p:sp>
       <p:sp>
         <p:nvSpPr>
-          <p:cNvPr id="6" name="Text 4"/>
+          <p:cNvPr id="8" name="Text 5"/>
           <p:cNvSpPr txBox="1"/>
           <p:nvPr/>
         </p:nvSpPr>
@@ -3529,7 +3804,7 @@
       </p:sp>
       <p:sp>
         <p:nvSpPr>
-          <p:cNvPr id="7" name="Shape 5"/>
+          <p:cNvPr id="9" name="Shape 6"/>
           <p:cNvSpPr/>
           <p:nvPr/>
         </p:nvSpPr>
@@ -3551,7 +3826,7 @@
       </p:sp>
       <p:sp>
         <p:nvSpPr>
-          <p:cNvPr id="8" name="Text 6"/>
+          <p:cNvPr id="10" name="Text 7"/>
           <p:cNvSpPr txBox="1"/>
           <p:nvPr/>
         </p:nvSpPr>
@@ -3613,7 +3888,7 @@
       </p:sp>
       <p:sp>
         <p:nvSpPr>
-          <p:cNvPr id="9" name="Text 7"/>
+          <p:cNvPr id="11" name="Text 8"/>
           <p:cNvSpPr txBox="1"/>
           <p:nvPr/>
         </p:nvSpPr>
@@ -3655,7 +3930,7 @@
       </p:sp>
       <p:sp>
         <p:nvSpPr>
-          <p:cNvPr id="10" name="Shape 8"/>
+          <p:cNvPr id="12" name="Shape 9"/>
           <p:cNvSpPr/>
           <p:nvPr/>
         </p:nvSpPr>
@@ -3682,7 +3957,7 @@
       </p:sp>
       <p:sp>
         <p:nvSpPr>
-          <p:cNvPr id="11" name="Text 9"/>
+          <p:cNvPr id="13" name="Text 10"/>
           <p:cNvSpPr txBox="1"/>
           <p:nvPr/>
         </p:nvSpPr>
@@ -3724,7 +3999,7 @@
       </p:sp>
       <p:sp>
         <p:nvSpPr>
-          <p:cNvPr id="12" name="Shape 10"/>
+          <p:cNvPr id="14" name="Shape 11"/>
           <p:cNvSpPr/>
           <p:nvPr/>
         </p:nvSpPr>
@@ -3746,7 +4021,7 @@
       </p:sp>
       <p:sp>
         <p:nvSpPr>
-          <p:cNvPr id="13" name="Text 11"/>
+          <p:cNvPr id="15" name="Text 12"/>
           <p:cNvSpPr txBox="1"/>
           <p:nvPr/>
         </p:nvSpPr>
@@ -3808,7 +4083,7 @@
       </p:sp>
       <p:sp>
         <p:nvSpPr>
-          <p:cNvPr id="14" name="Text 12"/>
+          <p:cNvPr id="16" name="Text 13"/>
           <p:cNvSpPr txBox="1"/>
           <p:nvPr/>
         </p:nvSpPr>
@@ -3850,7 +4125,7 @@
       </p:sp>
       <p:sp>
         <p:nvSpPr>
-          <p:cNvPr id="15" name="Shape 13"/>
+          <p:cNvPr id="17" name="Shape 14"/>
           <p:cNvSpPr/>
           <p:nvPr/>
         </p:nvSpPr>
@@ -3877,7 +4152,7 @@
       </p:sp>
       <p:sp>
         <p:nvSpPr>
-          <p:cNvPr id="16" name="Text 14"/>
+          <p:cNvPr id="18" name="Text 15"/>
           <p:cNvSpPr txBox="1"/>
           <p:nvPr/>
         </p:nvSpPr>
@@ -3919,7 +4194,7 @@
       </p:sp>
       <p:sp>
         <p:nvSpPr>
-          <p:cNvPr id="17" name="Shape 15"/>
+          <p:cNvPr id="19" name="Shape 16"/>
           <p:cNvSpPr/>
           <p:nvPr/>
         </p:nvSpPr>
@@ -3941,7 +4216,7 @@
       </p:sp>
       <p:sp>
         <p:nvSpPr>
-          <p:cNvPr id="18" name="Text 16"/>
+          <p:cNvPr id="20" name="Text 17"/>
           <p:cNvSpPr txBox="1"/>
           <p:nvPr/>
         </p:nvSpPr>
@@ -4003,7 +4278,7 @@
       </p:sp>
       <p:sp>
         <p:nvSpPr>
-          <p:cNvPr id="19" name="Text 17"/>
+          <p:cNvPr id="21" name="Text 18"/>
           <p:cNvSpPr txBox="1"/>
           <p:nvPr/>
         </p:nvSpPr>
@@ -4045,7 +4320,7 @@
       </p:sp>
       <p:sp>
         <p:nvSpPr>
-          <p:cNvPr id="20" name="Shape 18"/>
+          <p:cNvPr id="22" name="Shape 19"/>
           <p:cNvSpPr/>
           <p:nvPr/>
         </p:nvSpPr>
@@ -4072,7 +4347,7 @@
       </p:sp>
       <p:sp>
         <p:nvSpPr>
-          <p:cNvPr id="21" name="Shape 19"/>
+          <p:cNvPr id="23" name="Shape 20"/>
           <p:cNvSpPr/>
           <p:nvPr/>
         </p:nvSpPr>
@@ -4092,7 +4367,7 @@
       </p:sp>
       <p:sp>
         <p:nvSpPr>
-          <p:cNvPr id="22" name="Text 20"/>
+          <p:cNvPr id="24" name="Text 21"/>
           <p:cNvSpPr txBox="1"/>
           <p:nvPr/>
         </p:nvSpPr>
@@ -4131,7 +4406,7 @@
       </p:sp>
       <p:sp>
         <p:nvSpPr>
-          <p:cNvPr id="23" name="Text 21"/>
+          <p:cNvPr id="25" name="Text 22"/>
           <p:cNvSpPr txBox="1"/>
           <p:nvPr/>
         </p:nvSpPr>
@@ -4223,9 +4498,72 @@
           <a:chExt cx="0" cy="0"/>
         </a:xfrm>
       </p:grpSpPr>
-      <p:sp>
-        <p:nvSpPr>
-          <p:cNvPr id="2" name="Text 0"/>
+      <p:pic>
+        <p:nvPicPr>
+          <p:cNvPr id="2" name="Image 0" descr="/sessions/compassionate-sweet-heisenberg/mnt/dev-aspath-life-main/tools/assets/logo-deck.png">    </p:cNvPr>
+          <p:cNvPicPr>
+            <a:picLocks noChangeAspect="1"/>
+          </p:cNvPicPr>
+          <p:nvPr/>
+        </p:nvPicPr>
+        <p:blipFill>
+          <a:blip r:embed="rId1"/>
+          <a:stretch>
+            <a:fillRect/>
+          </a:stretch>
+        </p:blipFill>
+        <p:spPr>
+          <a:xfrm>
+            <a:off x="11458173" y="109728"/>
+            <a:ext cx="209571" cy="256032"/>
+          </a:xfrm>
+          <a:prstGeom prst="rect">
+            <a:avLst/>
+          </a:prstGeom>
+        </p:spPr>
+      </p:pic>
+      <p:sp>
+        <p:nvSpPr>
+          <p:cNvPr id="3" name="Text 0"/>
+          <p:cNvSpPr txBox="1"/>
+          <p:nvPr/>
+        </p:nvSpPr>
+        <p:spPr>
+          <a:xfrm>
+            <a:off x="8623533" y="128016"/>
+            <a:ext cx="2743200" cy="237744"/>
+          </a:xfrm>
+          <a:prstGeom prst="rect">
+            <a:avLst/>
+          </a:prstGeom>
+          <a:noFill/>
+          <a:ln/>
+        </p:spPr>
+        <p:txBody>
+          <a:bodyPr wrap="square" lIns="0" tIns="0" rIns="0" bIns="0" rtlCol="0" anchor="ctr"/>
+          <a:lstStyle/>
+          <a:p>
+            <a:pPr algn="r" indent="0" marL="0">
+              <a:buNone/>
+            </a:pPr>
+            <a:r>
+              <a:rPr lang="en-US" sz="750" dirty="0">
+                <a:solidFill>
+                  <a:srgbClr val="97A9AF"/>
+                </a:solidFill>
+                <a:latin typeface="Meiryo" pitchFamily="34" charset="0"/>
+                <a:ea typeface="Meiryo" pitchFamily="34" charset="-122"/>
+                <a:cs typeface="Meiryo" pitchFamily="34" charset="-120"/>
+              </a:rPr>
+              <a:t>鹿児島のパーキンソン病専門トレーニングスタジオ</a:t>
+            </a:r>
+            <a:endParaRPr lang="en-US" sz="750" dirty="0"/>
+          </a:p>
+        </p:txBody>
+      </p:sp>
+      <p:sp>
+        <p:nvSpPr>
+          <p:cNvPr id="4" name="Text 1"/>
           <p:cNvSpPr txBox="1"/>
           <p:nvPr/>
         </p:nvSpPr>
@@ -4264,7 +4602,7 @@
       </p:sp>
       <p:sp>
         <p:nvSpPr>
-          <p:cNvPr id="3" name="Text 1"/>
+          <p:cNvPr id="5" name="Text 2"/>
           <p:cNvSpPr txBox="1"/>
           <p:nvPr/>
         </p:nvSpPr>
@@ -4303,7 +4641,7 @@
       </p:sp>
       <p:sp>
         <p:nvSpPr>
-          <p:cNvPr id="4" name="Text 2"/>
+          <p:cNvPr id="6" name="Text 3"/>
           <p:cNvSpPr txBox="1"/>
           <p:nvPr/>
         </p:nvSpPr>
@@ -4342,7 +4680,7 @@
       </p:sp>
       <p:sp>
         <p:nvSpPr>
-          <p:cNvPr id="5" name="Shape 3"/>
+          <p:cNvPr id="7" name="Shape 4"/>
           <p:cNvSpPr/>
           <p:nvPr/>
         </p:nvSpPr>
@@ -4369,7 +4707,7 @@
       </p:sp>
       <p:sp>
         <p:nvSpPr>
-          <p:cNvPr id="6" name="Text 4"/>
+          <p:cNvPr id="8" name="Text 5"/>
           <p:cNvSpPr txBox="1"/>
           <p:nvPr/>
         </p:nvSpPr>
@@ -4408,7 +4746,7 @@
       </p:sp>
       <p:sp>
         <p:nvSpPr>
-          <p:cNvPr id="7" name="Text 5"/>
+          <p:cNvPr id="9" name="Text 6"/>
           <p:cNvSpPr txBox="1"/>
           <p:nvPr/>
         </p:nvSpPr>
@@ -4447,7 +4785,7 @@
       </p:sp>
       <p:sp>
         <p:nvSpPr>
-          <p:cNvPr id="8" name="Text 6"/>
+          <p:cNvPr id="10" name="Text 7"/>
           <p:cNvSpPr txBox="1"/>
           <p:nvPr/>
         </p:nvSpPr>
@@ -4486,7 +4824,7 @@
       </p:sp>
       <p:sp>
         <p:nvSpPr>
-          <p:cNvPr id="9" name="Shape 7"/>
+          <p:cNvPr id="11" name="Shape 8"/>
           <p:cNvSpPr/>
           <p:nvPr/>
         </p:nvSpPr>
@@ -4513,7 +4851,7 @@
       </p:sp>
       <p:sp>
         <p:nvSpPr>
-          <p:cNvPr id="10" name="Text 8"/>
+          <p:cNvPr id="12" name="Text 9"/>
           <p:cNvSpPr txBox="1"/>
           <p:nvPr/>
         </p:nvSpPr>
@@ -4552,7 +4890,7 @@
       </p:sp>
       <p:sp>
         <p:nvSpPr>
-          <p:cNvPr id="11" name="Text 9"/>
+          <p:cNvPr id="13" name="Text 10"/>
           <p:cNvSpPr txBox="1"/>
           <p:nvPr/>
         </p:nvSpPr>
@@ -4591,7 +4929,7 @@
       </p:sp>
       <p:sp>
         <p:nvSpPr>
-          <p:cNvPr id="12" name="Text 10"/>
+          <p:cNvPr id="14" name="Text 11"/>
           <p:cNvSpPr txBox="1"/>
           <p:nvPr/>
         </p:nvSpPr>
@@ -4630,7 +4968,7 @@
       </p:sp>
       <p:sp>
         <p:nvSpPr>
-          <p:cNvPr id="13" name="Shape 11"/>
+          <p:cNvPr id="15" name="Shape 12"/>
           <p:cNvSpPr/>
           <p:nvPr/>
         </p:nvSpPr>
@@ -4657,7 +4995,7 @@
       </p:sp>
       <p:sp>
         <p:nvSpPr>
-          <p:cNvPr id="14" name="Text 12"/>
+          <p:cNvPr id="16" name="Text 13"/>
           <p:cNvSpPr txBox="1"/>
           <p:nvPr/>
         </p:nvSpPr>
@@ -4696,7 +5034,7 @@
       </p:sp>
       <p:sp>
         <p:nvSpPr>
-          <p:cNvPr id="15" name="Text 13"/>
+          <p:cNvPr id="17" name="Text 14"/>
           <p:cNvSpPr txBox="1"/>
           <p:nvPr/>
         </p:nvSpPr>
@@ -4735,7 +5073,7 @@
       </p:sp>
       <p:sp>
         <p:nvSpPr>
-          <p:cNvPr id="16" name="Text 14"/>
+          <p:cNvPr id="18" name="Text 15"/>
           <p:cNvSpPr txBox="1"/>
           <p:nvPr/>
         </p:nvSpPr>
@@ -4774,7 +5112,7 @@
       </p:sp>
       <p:sp>
         <p:nvSpPr>
-          <p:cNvPr id="17" name="Shape 15"/>
+          <p:cNvPr id="19" name="Shape 16"/>
           <p:cNvSpPr/>
           <p:nvPr/>
         </p:nvSpPr>
@@ -4801,7 +5139,7 @@
       </p:sp>
       <p:sp>
         <p:nvSpPr>
-          <p:cNvPr id="18" name="Text 16"/>
+          <p:cNvPr id="20" name="Text 17"/>
           <p:cNvSpPr txBox="1"/>
           <p:nvPr/>
         </p:nvSpPr>
@@ -4840,7 +5178,7 @@
       </p:sp>
       <p:sp>
         <p:nvSpPr>
-          <p:cNvPr id="19" name="Text 17"/>
+          <p:cNvPr id="21" name="Text 18"/>
           <p:cNvSpPr txBox="1"/>
           <p:nvPr/>
         </p:nvSpPr>
@@ -4879,7 +5217,7 @@
       </p:sp>
       <p:sp>
         <p:nvSpPr>
-          <p:cNvPr id="20" name="Text 18"/>
+          <p:cNvPr id="22" name="Text 19"/>
           <p:cNvSpPr txBox="1"/>
           <p:nvPr/>
         </p:nvSpPr>
@@ -4918,7 +5256,7 @@
       </p:sp>
       <p:sp>
         <p:nvSpPr>
-          <p:cNvPr id="21" name="Shape 19"/>
+          <p:cNvPr id="23" name="Shape 20"/>
           <p:cNvSpPr/>
           <p:nvPr/>
         </p:nvSpPr>
@@ -4945,7 +5283,7 @@
       </p:sp>
       <p:sp>
         <p:nvSpPr>
-          <p:cNvPr id="22" name="Text 20"/>
+          <p:cNvPr id="24" name="Text 21"/>
           <p:cNvSpPr txBox="1"/>
           <p:nvPr/>
         </p:nvSpPr>
@@ -4984,7 +5322,7 @@
       </p:sp>
       <p:sp>
         <p:nvSpPr>
-          <p:cNvPr id="23" name="Text 21"/>
+          <p:cNvPr id="25" name="Text 22"/>
           <p:cNvSpPr txBox="1"/>
           <p:nvPr/>
         </p:nvSpPr>
@@ -5023,7 +5361,7 @@
       </p:sp>
       <p:sp>
         <p:nvSpPr>
-          <p:cNvPr id="24" name="Text 22"/>
+          <p:cNvPr id="26" name="Text 23"/>
           <p:cNvSpPr txBox="1"/>
           <p:nvPr/>
         </p:nvSpPr>
@@ -5062,7 +5400,7 @@
       </p:sp>
       <p:sp>
         <p:nvSpPr>
-          <p:cNvPr id="25" name="Shape 23"/>
+          <p:cNvPr id="27" name="Shape 24"/>
           <p:cNvSpPr/>
           <p:nvPr/>
         </p:nvSpPr>
@@ -5089,7 +5427,7 @@
       </p:sp>
       <p:sp>
         <p:nvSpPr>
-          <p:cNvPr id="26" name="Text 24"/>
+          <p:cNvPr id="28" name="Text 25"/>
           <p:cNvSpPr txBox="1"/>
           <p:nvPr/>
         </p:nvSpPr>
@@ -5128,7 +5466,7 @@
       </p:sp>
       <p:sp>
         <p:nvSpPr>
-          <p:cNvPr id="27" name="Text 25"/>
+          <p:cNvPr id="29" name="Text 26"/>
           <p:cNvSpPr txBox="1"/>
           <p:nvPr/>
         </p:nvSpPr>
@@ -5167,7 +5505,7 @@
       </p:sp>
       <p:sp>
         <p:nvSpPr>
-          <p:cNvPr id="28" name="Text 26"/>
+          <p:cNvPr id="30" name="Text 27"/>
           <p:cNvSpPr txBox="1"/>
           <p:nvPr/>
         </p:nvSpPr>
@@ -5206,7 +5544,7 @@
       </p:sp>
       <p:sp>
         <p:nvSpPr>
-          <p:cNvPr id="29" name="Shape 27"/>
+          <p:cNvPr id="31" name="Shape 28"/>
           <p:cNvSpPr/>
           <p:nvPr/>
         </p:nvSpPr>
@@ -5233,7 +5571,7 @@
       </p:sp>
       <p:sp>
         <p:nvSpPr>
-          <p:cNvPr id="30" name="Text 28"/>
+          <p:cNvPr id="32" name="Text 29"/>
           <p:cNvSpPr txBox="1"/>
           <p:nvPr/>
         </p:nvSpPr>
@@ -5272,7 +5610,7 @@
       </p:sp>
       <p:sp>
         <p:nvSpPr>
-          <p:cNvPr id="31" name="Text 29"/>
+          <p:cNvPr id="33" name="Text 30"/>
           <p:cNvSpPr txBox="1"/>
           <p:nvPr/>
         </p:nvSpPr>
@@ -5311,7 +5649,7 @@
       </p:sp>
       <p:sp>
         <p:nvSpPr>
-          <p:cNvPr id="32" name="Text 30"/>
+          <p:cNvPr id="34" name="Text 31"/>
           <p:cNvSpPr txBox="1"/>
           <p:nvPr/>
         </p:nvSpPr>
@@ -5350,7 +5688,7 @@
       </p:sp>
       <p:sp>
         <p:nvSpPr>
-          <p:cNvPr id="33" name="Shape 31"/>
+          <p:cNvPr id="35" name="Shape 32"/>
           <p:cNvSpPr/>
           <p:nvPr/>
         </p:nvSpPr>
@@ -5377,7 +5715,7 @@
       </p:sp>
       <p:sp>
         <p:nvSpPr>
-          <p:cNvPr id="34" name="Shape 32"/>
+          <p:cNvPr id="36" name="Shape 33"/>
           <p:cNvSpPr/>
           <p:nvPr/>
         </p:nvSpPr>
@@ -5397,7 +5735,7 @@
       </p:sp>
       <p:sp>
         <p:nvSpPr>
-          <p:cNvPr id="35" name="Text 33"/>
+          <p:cNvPr id="37" name="Text 34"/>
           <p:cNvSpPr txBox="1"/>
           <p:nvPr/>
         </p:nvSpPr>
@@ -5436,7 +5774,7 @@
       </p:sp>
       <p:sp>
         <p:nvSpPr>
-          <p:cNvPr id="36" name="Text 34"/>
+          <p:cNvPr id="38" name="Text 35"/>
           <p:cNvSpPr txBox="1"/>
           <p:nvPr/>
         </p:nvSpPr>
@@ -5528,9 +5866,72 @@
           <a:chExt cx="0" cy="0"/>
         </a:xfrm>
       </p:grpSpPr>
-      <p:sp>
-        <p:nvSpPr>
-          <p:cNvPr id="2" name="Text 0"/>
+      <p:pic>
+        <p:nvPicPr>
+          <p:cNvPr id="2" name="Image 0" descr="/sessions/compassionate-sweet-heisenberg/mnt/dev-aspath-life-main/tools/assets/logo-deck.png">    </p:cNvPr>
+          <p:cNvPicPr>
+            <a:picLocks noChangeAspect="1"/>
+          </p:cNvPicPr>
+          <p:nvPr/>
+        </p:nvPicPr>
+        <p:blipFill>
+          <a:blip r:embed="rId1"/>
+          <a:stretch>
+            <a:fillRect/>
+          </a:stretch>
+        </p:blipFill>
+        <p:spPr>
+          <a:xfrm>
+            <a:off x="11458173" y="109728"/>
+            <a:ext cx="209571" cy="256032"/>
+          </a:xfrm>
+          <a:prstGeom prst="rect">
+            <a:avLst/>
+          </a:prstGeom>
+        </p:spPr>
+      </p:pic>
+      <p:sp>
+        <p:nvSpPr>
+          <p:cNvPr id="3" name="Text 0"/>
+          <p:cNvSpPr txBox="1"/>
+          <p:nvPr/>
+        </p:nvSpPr>
+        <p:spPr>
+          <a:xfrm>
+            <a:off x="8623533" y="128016"/>
+            <a:ext cx="2743200" cy="237744"/>
+          </a:xfrm>
+          <a:prstGeom prst="rect">
+            <a:avLst/>
+          </a:prstGeom>
+          <a:noFill/>
+          <a:ln/>
+        </p:spPr>
+        <p:txBody>
+          <a:bodyPr wrap="square" lIns="0" tIns="0" rIns="0" bIns="0" rtlCol="0" anchor="ctr"/>
+          <a:lstStyle/>
+          <a:p>
+            <a:pPr algn="r" indent="0" marL="0">
+              <a:buNone/>
+            </a:pPr>
+            <a:r>
+              <a:rPr lang="en-US" sz="750" dirty="0">
+                <a:solidFill>
+                  <a:srgbClr val="97A9AF"/>
+                </a:solidFill>
+                <a:latin typeface="Meiryo" pitchFamily="34" charset="0"/>
+                <a:ea typeface="Meiryo" pitchFamily="34" charset="-122"/>
+                <a:cs typeface="Meiryo" pitchFamily="34" charset="-120"/>
+              </a:rPr>
+              <a:t>鹿児島のパーキンソン病専門トレーニングスタジオ</a:t>
+            </a:r>
+            <a:endParaRPr lang="en-US" sz="750" dirty="0"/>
+          </a:p>
+        </p:txBody>
+      </p:sp>
+      <p:sp>
+        <p:nvSpPr>
+          <p:cNvPr id="4" name="Text 1"/>
           <p:cNvSpPr txBox="1"/>
           <p:nvPr/>
         </p:nvSpPr>
@@ -5569,7 +5970,7 @@
       </p:sp>
       <p:sp>
         <p:nvSpPr>
-          <p:cNvPr id="3" name="Text 1"/>
+          <p:cNvPr id="5" name="Text 2"/>
           <p:cNvSpPr txBox="1"/>
           <p:nvPr/>
         </p:nvSpPr>
@@ -5608,7 +6009,7 @@
       </p:sp>
       <p:sp>
         <p:nvSpPr>
-          <p:cNvPr id="4" name="Text 2"/>
+          <p:cNvPr id="6" name="Text 3"/>
           <p:cNvSpPr txBox="1"/>
           <p:nvPr/>
         </p:nvSpPr>
@@ -5647,7 +6048,7 @@
       </p:sp>
       <p:sp>
         <p:nvSpPr>
-          <p:cNvPr id="5" name="Shape 3"/>
+          <p:cNvPr id="7" name="Shape 4"/>
           <p:cNvSpPr/>
           <p:nvPr/>
         </p:nvSpPr>
@@ -5674,7 +6075,7 @@
       </p:sp>
       <p:sp>
         <p:nvSpPr>
-          <p:cNvPr id="6" name="Shape 4"/>
+          <p:cNvPr id="8" name="Shape 5"/>
           <p:cNvSpPr/>
           <p:nvPr/>
         </p:nvSpPr>
@@ -5696,7 +6097,7 @@
       </p:sp>
       <p:sp>
         <p:nvSpPr>
-          <p:cNvPr id="7" name="Text 5"/>
+          <p:cNvPr id="9" name="Text 6"/>
           <p:cNvSpPr txBox="1"/>
           <p:nvPr/>
         </p:nvSpPr>
@@ -5738,7 +6139,7 @@
       </p:sp>
       <p:sp>
         <p:nvSpPr>
-          <p:cNvPr id="8" name="Text 6"/>
+          <p:cNvPr id="10" name="Text 7"/>
           <p:cNvSpPr txBox="1"/>
           <p:nvPr/>
         </p:nvSpPr>
@@ -5777,7 +6178,7 @@
       </p:sp>
       <p:sp>
         <p:nvSpPr>
-          <p:cNvPr id="9" name="Text 7"/>
+          <p:cNvPr id="11" name="Text 8"/>
           <p:cNvSpPr txBox="1"/>
           <p:nvPr/>
         </p:nvSpPr>
@@ -5819,7 +6220,7 @@
       </p:sp>
       <p:sp>
         <p:nvSpPr>
-          <p:cNvPr id="10" name="Shape 8"/>
+          <p:cNvPr id="12" name="Shape 9"/>
           <p:cNvSpPr/>
           <p:nvPr/>
         </p:nvSpPr>
@@ -5846,7 +6247,7 @@
       </p:sp>
       <p:sp>
         <p:nvSpPr>
-          <p:cNvPr id="11" name="Shape 9"/>
+          <p:cNvPr id="13" name="Shape 10"/>
           <p:cNvSpPr/>
           <p:nvPr/>
         </p:nvSpPr>
@@ -5868,7 +6269,7 @@
       </p:sp>
       <p:sp>
         <p:nvSpPr>
-          <p:cNvPr id="12" name="Text 10"/>
+          <p:cNvPr id="14" name="Text 11"/>
           <p:cNvSpPr txBox="1"/>
           <p:nvPr/>
         </p:nvSpPr>
@@ -5930,7 +6331,7 @@
       </p:sp>
       <p:sp>
         <p:nvSpPr>
-          <p:cNvPr id="13" name="Text 11"/>
+          <p:cNvPr id="15" name="Text 12"/>
           <p:cNvSpPr txBox="1"/>
           <p:nvPr/>
         </p:nvSpPr>
@@ -5969,7 +6370,7 @@
       </p:sp>
       <p:sp>
         <p:nvSpPr>
-          <p:cNvPr id="14" name="Text 12"/>
+          <p:cNvPr id="16" name="Text 13"/>
           <p:cNvSpPr txBox="1"/>
           <p:nvPr/>
         </p:nvSpPr>
@@ -6011,7 +6412,7 @@
       </p:sp>
       <p:sp>
         <p:nvSpPr>
-          <p:cNvPr id="15" name="Shape 13"/>
+          <p:cNvPr id="17" name="Shape 14"/>
           <p:cNvSpPr/>
           <p:nvPr/>
         </p:nvSpPr>
@@ -6038,7 +6439,7 @@
       </p:sp>
       <p:sp>
         <p:nvSpPr>
-          <p:cNvPr id="16" name="Shape 14"/>
+          <p:cNvPr id="18" name="Shape 15"/>
           <p:cNvSpPr/>
           <p:nvPr/>
         </p:nvSpPr>
@@ -6060,7 +6461,7 @@
       </p:sp>
       <p:sp>
         <p:nvSpPr>
-          <p:cNvPr id="17" name="Text 15"/>
+          <p:cNvPr id="19" name="Text 16"/>
           <p:cNvSpPr txBox="1"/>
           <p:nvPr/>
         </p:nvSpPr>
@@ -6122,7 +6523,7 @@
       </p:sp>
       <p:sp>
         <p:nvSpPr>
-          <p:cNvPr id="18" name="Text 16"/>
+          <p:cNvPr id="20" name="Text 17"/>
           <p:cNvSpPr txBox="1"/>
           <p:nvPr/>
         </p:nvSpPr>
@@ -6161,7 +6562,7 @@
       </p:sp>
       <p:sp>
         <p:nvSpPr>
-          <p:cNvPr id="19" name="Text 17"/>
+          <p:cNvPr id="21" name="Text 18"/>
           <p:cNvSpPr txBox="1"/>
           <p:nvPr/>
         </p:nvSpPr>
@@ -6203,7 +6604,7 @@
       </p:sp>
       <p:sp>
         <p:nvSpPr>
-          <p:cNvPr id="20" name="Shape 18"/>
+          <p:cNvPr id="22" name="Shape 19"/>
           <p:cNvSpPr/>
           <p:nvPr/>
         </p:nvSpPr>
@@ -6230,7 +6631,7 @@
       </p:sp>
       <p:sp>
         <p:nvSpPr>
-          <p:cNvPr id="21" name="Shape 19"/>
+          <p:cNvPr id="23" name="Shape 20"/>
           <p:cNvSpPr/>
           <p:nvPr/>
         </p:nvSpPr>
@@ -6252,7 +6653,7 @@
       </p:sp>
       <p:sp>
         <p:nvSpPr>
-          <p:cNvPr id="22" name="Text 20"/>
+          <p:cNvPr id="24" name="Text 21"/>
           <p:cNvSpPr txBox="1"/>
           <p:nvPr/>
         </p:nvSpPr>
@@ -6314,7 +6715,7 @@
       </p:sp>
       <p:sp>
         <p:nvSpPr>
-          <p:cNvPr id="23" name="Text 21"/>
+          <p:cNvPr id="25" name="Text 22"/>
           <p:cNvSpPr txBox="1"/>
           <p:nvPr/>
         </p:nvSpPr>
@@ -6353,7 +6754,7 @@
       </p:sp>
       <p:sp>
         <p:nvSpPr>
-          <p:cNvPr id="24" name="Text 22"/>
+          <p:cNvPr id="26" name="Text 23"/>
           <p:cNvSpPr txBox="1"/>
           <p:nvPr/>
         </p:nvSpPr>
@@ -6395,7 +6796,7 @@
       </p:sp>
       <p:sp>
         <p:nvSpPr>
-          <p:cNvPr id="25" name="Shape 23"/>
+          <p:cNvPr id="27" name="Shape 24"/>
           <p:cNvSpPr/>
           <p:nvPr/>
         </p:nvSpPr>
@@ -6422,7 +6823,7 @@
       </p:sp>
       <p:sp>
         <p:nvSpPr>
-          <p:cNvPr id="26" name="Shape 24"/>
+          <p:cNvPr id="28" name="Shape 25"/>
           <p:cNvSpPr/>
           <p:nvPr/>
         </p:nvSpPr>
@@ -6442,7 +6843,7 @@
       </p:sp>
       <p:sp>
         <p:nvSpPr>
-          <p:cNvPr id="27" name="Text 25"/>
+          <p:cNvPr id="29" name="Text 26"/>
           <p:cNvSpPr txBox="1"/>
           <p:nvPr/>
         </p:nvSpPr>
@@ -6481,7 +6882,7 @@
       </p:sp>
       <p:sp>
         <p:nvSpPr>
-          <p:cNvPr id="28" name="Text 26"/>
+          <p:cNvPr id="30" name="Text 27"/>
           <p:cNvSpPr txBox="1"/>
           <p:nvPr/>
         </p:nvSpPr>
@@ -6573,9 +6974,72 @@
           <a:chExt cx="0" cy="0"/>
         </a:xfrm>
       </p:grpSpPr>
-      <p:sp>
-        <p:nvSpPr>
-          <p:cNvPr id="2" name="Text 0"/>
+      <p:pic>
+        <p:nvPicPr>
+          <p:cNvPr id="2" name="Image 0" descr="/sessions/compassionate-sweet-heisenberg/mnt/dev-aspath-life-main/tools/assets/logo-deck.png">    </p:cNvPr>
+          <p:cNvPicPr>
+            <a:picLocks noChangeAspect="1"/>
+          </p:cNvPicPr>
+          <p:nvPr/>
+        </p:nvPicPr>
+        <p:blipFill>
+          <a:blip r:embed="rId1"/>
+          <a:stretch>
+            <a:fillRect/>
+          </a:stretch>
+        </p:blipFill>
+        <p:spPr>
+          <a:xfrm>
+            <a:off x="11458173" y="109728"/>
+            <a:ext cx="209571" cy="256032"/>
+          </a:xfrm>
+          <a:prstGeom prst="rect">
+            <a:avLst/>
+          </a:prstGeom>
+        </p:spPr>
+      </p:pic>
+      <p:sp>
+        <p:nvSpPr>
+          <p:cNvPr id="3" name="Text 0"/>
+          <p:cNvSpPr txBox="1"/>
+          <p:nvPr/>
+        </p:nvSpPr>
+        <p:spPr>
+          <a:xfrm>
+            <a:off x="8623533" y="128016"/>
+            <a:ext cx="2743200" cy="237744"/>
+          </a:xfrm>
+          <a:prstGeom prst="rect">
+            <a:avLst/>
+          </a:prstGeom>
+          <a:noFill/>
+          <a:ln/>
+        </p:spPr>
+        <p:txBody>
+          <a:bodyPr wrap="square" lIns="0" tIns="0" rIns="0" bIns="0" rtlCol="0" anchor="ctr"/>
+          <a:lstStyle/>
+          <a:p>
+            <a:pPr algn="r" indent="0" marL="0">
+              <a:buNone/>
+            </a:pPr>
+            <a:r>
+              <a:rPr lang="en-US" sz="750" dirty="0">
+                <a:solidFill>
+                  <a:srgbClr val="97A9AF"/>
+                </a:solidFill>
+                <a:latin typeface="Meiryo" pitchFamily="34" charset="0"/>
+                <a:ea typeface="Meiryo" pitchFamily="34" charset="-122"/>
+                <a:cs typeface="Meiryo" pitchFamily="34" charset="-120"/>
+              </a:rPr>
+              <a:t>鹿児島のパーキンソン病専門トレーニングスタジオ</a:t>
+            </a:r>
+            <a:endParaRPr lang="en-US" sz="750" dirty="0"/>
+          </a:p>
+        </p:txBody>
+      </p:sp>
+      <p:sp>
+        <p:nvSpPr>
+          <p:cNvPr id="4" name="Text 1"/>
           <p:cNvSpPr txBox="1"/>
           <p:nvPr/>
         </p:nvSpPr>
@@ -6614,7 +7078,7 @@
       </p:sp>
       <p:sp>
         <p:nvSpPr>
-          <p:cNvPr id="3" name="Text 1"/>
+          <p:cNvPr id="5" name="Text 2"/>
           <p:cNvSpPr txBox="1"/>
           <p:nvPr/>
         </p:nvSpPr>
@@ -6653,7 +7117,7 @@
       </p:sp>
       <p:sp>
         <p:nvSpPr>
-          <p:cNvPr id="4" name="Text 2"/>
+          <p:cNvPr id="6" name="Text 3"/>
           <p:cNvSpPr txBox="1"/>
           <p:nvPr/>
         </p:nvSpPr>
@@ -6692,7 +7156,7 @@
       </p:sp>
       <p:sp>
         <p:nvSpPr>
-          <p:cNvPr id="5" name="Shape 3"/>
+          <p:cNvPr id="7" name="Shape 4"/>
           <p:cNvSpPr/>
           <p:nvPr/>
         </p:nvSpPr>
@@ -6719,7 +7183,7 @@
       </p:sp>
       <p:sp>
         <p:nvSpPr>
-          <p:cNvPr id="6" name="Shape 4"/>
+          <p:cNvPr id="8" name="Shape 5"/>
           <p:cNvSpPr/>
           <p:nvPr/>
         </p:nvSpPr>
@@ -6741,7 +7205,7 @@
       </p:sp>
       <p:sp>
         <p:nvSpPr>
-          <p:cNvPr id="7" name="Text 5"/>
+          <p:cNvPr id="9" name="Text 6"/>
           <p:cNvSpPr txBox="1"/>
           <p:nvPr/>
         </p:nvSpPr>
@@ -6780,7 +7244,7 @@
       </p:sp>
       <p:sp>
         <p:nvSpPr>
-          <p:cNvPr id="8" name="Text 6"/>
+          <p:cNvPr id="10" name="Text 7"/>
           <p:cNvSpPr txBox="1"/>
           <p:nvPr/>
         </p:nvSpPr>
@@ -7042,7 +7506,7 @@
       </p:sp>
       <p:sp>
         <p:nvSpPr>
-          <p:cNvPr id="9" name="Shape 7"/>
+          <p:cNvPr id="11" name="Shape 8"/>
           <p:cNvSpPr/>
           <p:nvPr/>
         </p:nvSpPr>
@@ -7062,7 +7526,7 @@
       </p:sp>
       <p:sp>
         <p:nvSpPr>
-          <p:cNvPr id="10" name="Text 8"/>
+          <p:cNvPr id="12" name="Text 9"/>
           <p:cNvSpPr txBox="1"/>
           <p:nvPr/>
         </p:nvSpPr>
@@ -7101,7 +7565,7 @@
       </p:sp>
       <p:sp>
         <p:nvSpPr>
-          <p:cNvPr id="11" name="Text 9"/>
+          <p:cNvPr id="13" name="Text 10"/>
           <p:cNvSpPr txBox="1"/>
           <p:nvPr/>
         </p:nvSpPr>
@@ -7157,7 +7621,7 @@
       </p:sp>
       <p:sp>
         <p:nvSpPr>
-          <p:cNvPr id="12" name="Shape 10"/>
+          <p:cNvPr id="14" name="Shape 11"/>
           <p:cNvSpPr/>
           <p:nvPr/>
         </p:nvSpPr>
@@ -7177,7 +7641,7 @@
       </p:sp>
       <p:sp>
         <p:nvSpPr>
-          <p:cNvPr id="13" name="Text 11"/>
+          <p:cNvPr id="15" name="Text 12"/>
           <p:cNvSpPr txBox="1"/>
           <p:nvPr/>
         </p:nvSpPr>
@@ -7216,7 +7680,7 @@
       </p:sp>
       <p:sp>
         <p:nvSpPr>
-          <p:cNvPr id="14" name="Text 12"/>
+          <p:cNvPr id="16" name="Text 13"/>
           <p:cNvSpPr txBox="1"/>
           <p:nvPr/>
         </p:nvSpPr>
@@ -7261,7 +7725,7 @@
       </p:sp>
       <p:sp>
         <p:nvSpPr>
-          <p:cNvPr id="15" name="Shape 13"/>
+          <p:cNvPr id="17" name="Shape 14"/>
           <p:cNvSpPr/>
           <p:nvPr/>
         </p:nvSpPr>
@@ -7281,7 +7745,7 @@
       </p:sp>
       <p:sp>
         <p:nvSpPr>
-          <p:cNvPr id="16" name="Text 14"/>
+          <p:cNvPr id="18" name="Text 15"/>
           <p:cNvSpPr txBox="1"/>
           <p:nvPr/>
         </p:nvSpPr>
@@ -7320,7 +7784,7 @@
       </p:sp>
       <p:sp>
         <p:nvSpPr>
-          <p:cNvPr id="17" name="Text 15"/>
+          <p:cNvPr id="19" name="Text 16"/>
           <p:cNvSpPr txBox="1"/>
           <p:nvPr/>
         </p:nvSpPr>
@@ -7376,7 +7840,7 @@
       </p:sp>
       <p:sp>
         <p:nvSpPr>
-          <p:cNvPr id="18" name="Shape 16"/>
+          <p:cNvPr id="20" name="Shape 17"/>
           <p:cNvSpPr/>
           <p:nvPr/>
         </p:nvSpPr>
@@ -7396,7 +7860,7 @@
       </p:sp>
       <p:sp>
         <p:nvSpPr>
-          <p:cNvPr id="19" name="Text 17"/>
+          <p:cNvPr id="21" name="Text 18"/>
           <p:cNvSpPr txBox="1"/>
           <p:nvPr/>
         </p:nvSpPr>
@@ -7435,7 +7899,7 @@
       </p:sp>
       <p:sp>
         <p:nvSpPr>
-          <p:cNvPr id="20" name="Text 18"/>
+          <p:cNvPr id="22" name="Text 19"/>
           <p:cNvSpPr txBox="1"/>
           <p:nvPr/>
         </p:nvSpPr>
@@ -7480,7 +7944,7 @@
       </p:sp>
       <p:sp>
         <p:nvSpPr>
-          <p:cNvPr id="21" name="Shape 19"/>
+          <p:cNvPr id="23" name="Shape 20"/>
           <p:cNvSpPr/>
           <p:nvPr/>
         </p:nvSpPr>
@@ -7507,7 +7971,7 @@
       </p:sp>
       <p:sp>
         <p:nvSpPr>
-          <p:cNvPr id="22" name="Shape 20"/>
+          <p:cNvPr id="24" name="Shape 21"/>
           <p:cNvSpPr/>
           <p:nvPr/>
         </p:nvSpPr>
@@ -7527,7 +7991,7 @@
       </p:sp>
       <p:sp>
         <p:nvSpPr>
-          <p:cNvPr id="23" name="Text 21"/>
+          <p:cNvPr id="25" name="Text 22"/>
           <p:cNvSpPr txBox="1"/>
           <p:nvPr/>
         </p:nvSpPr>
@@ -7566,7 +8030,7 @@
       </p:sp>
       <p:sp>
         <p:nvSpPr>
-          <p:cNvPr id="24" name="Text 22"/>
+          <p:cNvPr id="26" name="Text 23"/>
           <p:cNvSpPr txBox="1"/>
           <p:nvPr/>
         </p:nvSpPr>
@@ -7628,7 +8092,7 @@
       </p:sp>
       <p:sp>
         <p:nvSpPr>
-          <p:cNvPr id="25" name="Shape 23"/>
+          <p:cNvPr id="27" name="Shape 24"/>
           <p:cNvSpPr/>
           <p:nvPr/>
         </p:nvSpPr>
@@ -7655,7 +8119,7 @@
       </p:sp>
       <p:sp>
         <p:nvSpPr>
-          <p:cNvPr id="26" name="Shape 24"/>
+          <p:cNvPr id="28" name="Shape 25"/>
           <p:cNvSpPr/>
           <p:nvPr/>
         </p:nvSpPr>
@@ -7675,7 +8139,7 @@
       </p:sp>
       <p:sp>
         <p:nvSpPr>
-          <p:cNvPr id="27" name="Text 25"/>
+          <p:cNvPr id="29" name="Text 26"/>
           <p:cNvSpPr txBox="1"/>
           <p:nvPr/>
         </p:nvSpPr>
@@ -7714,7 +8178,7 @@
       </p:sp>
       <p:sp>
         <p:nvSpPr>
-          <p:cNvPr id="28" name="Text 26"/>
+          <p:cNvPr id="30" name="Text 27"/>
           <p:cNvSpPr txBox="1"/>
           <p:nvPr/>
         </p:nvSpPr>
@@ -8507,9 +8971,72 @@
           <a:chExt cx="0" cy="0"/>
         </a:xfrm>
       </p:grpSpPr>
-      <p:sp>
-        <p:nvSpPr>
-          <p:cNvPr id="2" name="Text 0"/>
+      <p:pic>
+        <p:nvPicPr>
+          <p:cNvPr id="2" name="Image 0" descr="/sessions/compassionate-sweet-heisenberg/mnt/dev-aspath-life-main/tools/assets/logo-deck.png">    </p:cNvPr>
+          <p:cNvPicPr>
+            <a:picLocks noChangeAspect="1"/>
+          </p:cNvPicPr>
+          <p:nvPr/>
+        </p:nvPicPr>
+        <p:blipFill>
+          <a:blip r:embed="rId1"/>
+          <a:stretch>
+            <a:fillRect/>
+          </a:stretch>
+        </p:blipFill>
+        <p:spPr>
+          <a:xfrm>
+            <a:off x="11458173" y="109728"/>
+            <a:ext cx="209571" cy="256032"/>
+          </a:xfrm>
+          <a:prstGeom prst="rect">
+            <a:avLst/>
+          </a:prstGeom>
+        </p:spPr>
+      </p:pic>
+      <p:sp>
+        <p:nvSpPr>
+          <p:cNvPr id="3" name="Text 0"/>
+          <p:cNvSpPr txBox="1"/>
+          <p:nvPr/>
+        </p:nvSpPr>
+        <p:spPr>
+          <a:xfrm>
+            <a:off x="8623533" y="128016"/>
+            <a:ext cx="2743200" cy="237744"/>
+          </a:xfrm>
+          <a:prstGeom prst="rect">
+            <a:avLst/>
+          </a:prstGeom>
+          <a:noFill/>
+          <a:ln/>
+        </p:spPr>
+        <p:txBody>
+          <a:bodyPr wrap="square" lIns="0" tIns="0" rIns="0" bIns="0" rtlCol="0" anchor="ctr"/>
+          <a:lstStyle/>
+          <a:p>
+            <a:pPr algn="r" indent="0" marL="0">
+              <a:buNone/>
+            </a:pPr>
+            <a:r>
+              <a:rPr lang="en-US" sz="750" dirty="0">
+                <a:solidFill>
+                  <a:srgbClr val="97A9AF"/>
+                </a:solidFill>
+                <a:latin typeface="Meiryo" pitchFamily="34" charset="0"/>
+                <a:ea typeface="Meiryo" pitchFamily="34" charset="-122"/>
+                <a:cs typeface="Meiryo" pitchFamily="34" charset="-120"/>
+              </a:rPr>
+              <a:t>鹿児島のパーキンソン病専門トレーニングスタジオ</a:t>
+            </a:r>
+            <a:endParaRPr lang="en-US" sz="750" dirty="0"/>
+          </a:p>
+        </p:txBody>
+      </p:sp>
+      <p:sp>
+        <p:nvSpPr>
+          <p:cNvPr id="4" name="Text 1"/>
           <p:cNvSpPr txBox="1"/>
           <p:nvPr/>
         </p:nvSpPr>
@@ -8548,7 +9075,7 @@
       </p:sp>
       <p:sp>
         <p:nvSpPr>
-          <p:cNvPr id="3" name="Text 1"/>
+          <p:cNvPr id="5" name="Text 2"/>
           <p:cNvSpPr txBox="1"/>
           <p:nvPr/>
         </p:nvSpPr>
@@ -8587,7 +9114,7 @@
       </p:sp>
       <p:sp>
         <p:nvSpPr>
-          <p:cNvPr id="4" name="Text 2"/>
+          <p:cNvPr id="6" name="Text 3"/>
           <p:cNvSpPr txBox="1"/>
           <p:nvPr/>
         </p:nvSpPr>
@@ -8626,7 +9153,7 @@
       </p:sp>
       <p:sp>
         <p:nvSpPr>
-          <p:cNvPr id="5" name="Shape 3"/>
+          <p:cNvPr id="7" name="Shape 4"/>
           <p:cNvSpPr/>
           <p:nvPr/>
         </p:nvSpPr>
@@ -8653,7 +9180,7 @@
       </p:sp>
       <p:sp>
         <p:nvSpPr>
-          <p:cNvPr id="6" name="Text 4"/>
+          <p:cNvPr id="8" name="Text 5"/>
           <p:cNvSpPr txBox="1"/>
           <p:nvPr/>
         </p:nvSpPr>
@@ -8692,7 +9219,7 @@
       </p:sp>
       <p:sp>
         <p:nvSpPr>
-          <p:cNvPr id="7" name="Text 5"/>
+          <p:cNvPr id="9" name="Text 6"/>
           <p:cNvSpPr txBox="1"/>
           <p:nvPr/>
         </p:nvSpPr>
@@ -8774,7 +9301,7 @@
       </p:sp>
       <p:sp>
         <p:nvSpPr>
-          <p:cNvPr id="8" name="Text 6"/>
+          <p:cNvPr id="10" name="Text 7"/>
           <p:cNvSpPr txBox="1"/>
           <p:nvPr/>
         </p:nvSpPr>
@@ -8856,7 +9383,7 @@
       </p:sp>
       <p:sp>
         <p:nvSpPr>
-          <p:cNvPr id="9" name="Shape 7"/>
+          <p:cNvPr id="11" name="Shape 8"/>
           <p:cNvSpPr/>
           <p:nvPr/>
         </p:nvSpPr>
@@ -8883,7 +9410,7 @@
       </p:sp>
       <p:sp>
         <p:nvSpPr>
-          <p:cNvPr id="10" name="Text 8"/>
+          <p:cNvPr id="12" name="Text 9"/>
           <p:cNvSpPr txBox="1"/>
           <p:nvPr/>
         </p:nvSpPr>
@@ -8922,7 +9449,7 @@
       </p:sp>
       <p:sp>
         <p:nvSpPr>
-          <p:cNvPr id="11" name="Text 9"/>
+          <p:cNvPr id="13" name="Text 10"/>
           <p:cNvSpPr txBox="1"/>
           <p:nvPr/>
         </p:nvSpPr>
@@ -9004,7 +9531,7 @@
       </p:sp>
       <p:sp>
         <p:nvSpPr>
-          <p:cNvPr id="12" name="Text 10"/>
+          <p:cNvPr id="14" name="Text 11"/>
           <p:cNvSpPr txBox="1"/>
           <p:nvPr/>
         </p:nvSpPr>
@@ -9086,7 +9613,7 @@
       </p:sp>
       <p:sp>
         <p:nvSpPr>
-          <p:cNvPr id="13" name="Shape 11"/>
+          <p:cNvPr id="15" name="Shape 12"/>
           <p:cNvSpPr/>
           <p:nvPr/>
         </p:nvSpPr>
@@ -9113,7 +9640,7 @@
       </p:sp>
       <p:sp>
         <p:nvSpPr>
-          <p:cNvPr id="14" name="Text 12"/>
+          <p:cNvPr id="16" name="Text 13"/>
           <p:cNvSpPr txBox="1"/>
           <p:nvPr/>
         </p:nvSpPr>
@@ -9152,7 +9679,7 @@
       </p:sp>
       <p:sp>
         <p:nvSpPr>
-          <p:cNvPr id="15" name="Text 13"/>
+          <p:cNvPr id="17" name="Text 14"/>
           <p:cNvSpPr txBox="1"/>
           <p:nvPr/>
         </p:nvSpPr>
@@ -9214,7 +9741,7 @@
       </p:sp>
       <p:sp>
         <p:nvSpPr>
-          <p:cNvPr id="16" name="Text 14"/>
+          <p:cNvPr id="18" name="Text 15"/>
           <p:cNvSpPr txBox="1"/>
           <p:nvPr/>
         </p:nvSpPr>
@@ -9296,7 +9823,7 @@
       </p:sp>
       <p:sp>
         <p:nvSpPr>
-          <p:cNvPr id="17" name="Shape 15"/>
+          <p:cNvPr id="19" name="Shape 16"/>
           <p:cNvSpPr/>
           <p:nvPr/>
         </p:nvSpPr>
@@ -9323,7 +9850,7 @@
       </p:sp>
       <p:sp>
         <p:nvSpPr>
-          <p:cNvPr id="18" name="Shape 16"/>
+          <p:cNvPr id="20" name="Shape 17"/>
           <p:cNvSpPr/>
           <p:nvPr/>
         </p:nvSpPr>
@@ -9343,7 +9870,7 @@
       </p:sp>
       <p:sp>
         <p:nvSpPr>
-          <p:cNvPr id="19" name="Text 17"/>
+          <p:cNvPr id="21" name="Text 18"/>
           <p:cNvSpPr txBox="1"/>
           <p:nvPr/>
         </p:nvSpPr>
@@ -9382,7 +9909,7 @@
       </p:sp>
       <p:sp>
         <p:nvSpPr>
-          <p:cNvPr id="20" name="Text 18"/>
+          <p:cNvPr id="22" name="Text 19"/>
           <p:cNvSpPr txBox="1"/>
           <p:nvPr/>
         </p:nvSpPr>
@@ -9474,9 +10001,72 @@
           <a:chExt cx="0" cy="0"/>
         </a:xfrm>
       </p:grpSpPr>
-      <p:sp>
-        <p:nvSpPr>
-          <p:cNvPr id="2" name="Text 0"/>
+      <p:pic>
+        <p:nvPicPr>
+          <p:cNvPr id="2" name="Image 0" descr="/sessions/compassionate-sweet-heisenberg/mnt/dev-aspath-life-main/tools/assets/logo-deck.png">    </p:cNvPr>
+          <p:cNvPicPr>
+            <a:picLocks noChangeAspect="1"/>
+          </p:cNvPicPr>
+          <p:nvPr/>
+        </p:nvPicPr>
+        <p:blipFill>
+          <a:blip r:embed="rId1"/>
+          <a:stretch>
+            <a:fillRect/>
+          </a:stretch>
+        </p:blipFill>
+        <p:spPr>
+          <a:xfrm>
+            <a:off x="11458173" y="109728"/>
+            <a:ext cx="209571" cy="256032"/>
+          </a:xfrm>
+          <a:prstGeom prst="rect">
+            <a:avLst/>
+          </a:prstGeom>
+        </p:spPr>
+      </p:pic>
+      <p:sp>
+        <p:nvSpPr>
+          <p:cNvPr id="3" name="Text 0"/>
+          <p:cNvSpPr txBox="1"/>
+          <p:nvPr/>
+        </p:nvSpPr>
+        <p:spPr>
+          <a:xfrm>
+            <a:off x="8623533" y="128016"/>
+            <a:ext cx="2743200" cy="237744"/>
+          </a:xfrm>
+          <a:prstGeom prst="rect">
+            <a:avLst/>
+          </a:prstGeom>
+          <a:noFill/>
+          <a:ln/>
+        </p:spPr>
+        <p:txBody>
+          <a:bodyPr wrap="square" lIns="0" tIns="0" rIns="0" bIns="0" rtlCol="0" anchor="ctr"/>
+          <a:lstStyle/>
+          <a:p>
+            <a:pPr algn="r" indent="0" marL="0">
+              <a:buNone/>
+            </a:pPr>
+            <a:r>
+              <a:rPr lang="en-US" sz="750" dirty="0">
+                <a:solidFill>
+                  <a:srgbClr val="97A9AF"/>
+                </a:solidFill>
+                <a:latin typeface="Meiryo" pitchFamily="34" charset="0"/>
+                <a:ea typeface="Meiryo" pitchFamily="34" charset="-122"/>
+                <a:cs typeface="Meiryo" pitchFamily="34" charset="-120"/>
+              </a:rPr>
+              <a:t>鹿児島のパーキンソン病専門トレーニングスタジオ</a:t>
+            </a:r>
+            <a:endParaRPr lang="en-US" sz="750" dirty="0"/>
+          </a:p>
+        </p:txBody>
+      </p:sp>
+      <p:sp>
+        <p:nvSpPr>
+          <p:cNvPr id="4" name="Text 1"/>
           <p:cNvSpPr txBox="1"/>
           <p:nvPr/>
         </p:nvSpPr>
@@ -9515,7 +10105,7 @@
       </p:sp>
       <p:sp>
         <p:nvSpPr>
-          <p:cNvPr id="3" name="Text 1"/>
+          <p:cNvPr id="5" name="Text 2"/>
           <p:cNvSpPr txBox="1"/>
           <p:nvPr/>
         </p:nvSpPr>
@@ -9554,7 +10144,7 @@
       </p:sp>
       <p:sp>
         <p:nvSpPr>
-          <p:cNvPr id="4" name="Text 2"/>
+          <p:cNvPr id="6" name="Text 3"/>
           <p:cNvSpPr txBox="1"/>
           <p:nvPr/>
         </p:nvSpPr>
@@ -9593,7 +10183,7 @@
       </p:sp>
       <p:sp>
         <p:nvSpPr>
-          <p:cNvPr id="5" name="Shape 3"/>
+          <p:cNvPr id="7" name="Shape 4"/>
           <p:cNvSpPr/>
           <p:nvPr/>
         </p:nvSpPr>
@@ -9613,7 +10203,7 @@
       </p:sp>
       <p:sp>
         <p:nvSpPr>
-          <p:cNvPr id="6" name="Text 4"/>
+          <p:cNvPr id="8" name="Text 5"/>
           <p:cNvSpPr txBox="1"/>
           <p:nvPr/>
         </p:nvSpPr>
@@ -9652,7 +10242,7 @@
       </p:sp>
       <p:sp>
         <p:nvSpPr>
-          <p:cNvPr id="7" name="Text 5"/>
+          <p:cNvPr id="9" name="Text 6"/>
           <p:cNvSpPr txBox="1"/>
           <p:nvPr/>
         </p:nvSpPr>
@@ -9708,7 +10298,7 @@
       </p:sp>
       <p:sp>
         <p:nvSpPr>
-          <p:cNvPr id="8" name="Shape 6"/>
+          <p:cNvPr id="10" name="Shape 7"/>
           <p:cNvSpPr/>
           <p:nvPr/>
         </p:nvSpPr>
@@ -9728,7 +10318,7 @@
       </p:sp>
       <p:sp>
         <p:nvSpPr>
-          <p:cNvPr id="9" name="Text 7"/>
+          <p:cNvPr id="11" name="Text 8"/>
           <p:cNvSpPr txBox="1"/>
           <p:nvPr/>
         </p:nvSpPr>
@@ -9767,7 +10357,7 @@
       </p:sp>
       <p:sp>
         <p:nvSpPr>
-          <p:cNvPr id="10" name="Text 8"/>
+          <p:cNvPr id="12" name="Text 9"/>
           <p:cNvSpPr txBox="1"/>
           <p:nvPr/>
         </p:nvSpPr>
@@ -9823,7 +10413,7 @@
       </p:sp>
       <p:sp>
         <p:nvSpPr>
-          <p:cNvPr id="11" name="Shape 9"/>
+          <p:cNvPr id="13" name="Shape 10"/>
           <p:cNvSpPr/>
           <p:nvPr/>
         </p:nvSpPr>
@@ -9843,7 +10433,7 @@
       </p:sp>
       <p:sp>
         <p:nvSpPr>
-          <p:cNvPr id="12" name="Text 10"/>
+          <p:cNvPr id="14" name="Text 11"/>
           <p:cNvSpPr txBox="1"/>
           <p:nvPr/>
         </p:nvSpPr>
@@ -9882,7 +10472,7 @@
       </p:sp>
       <p:sp>
         <p:nvSpPr>
-          <p:cNvPr id="13" name="Text 11"/>
+          <p:cNvPr id="15" name="Text 12"/>
           <p:cNvSpPr txBox="1"/>
           <p:nvPr/>
         </p:nvSpPr>
@@ -9938,7 +10528,7 @@
       </p:sp>
       <p:sp>
         <p:nvSpPr>
-          <p:cNvPr id="14" name="Shape 12"/>
+          <p:cNvPr id="16" name="Shape 13"/>
           <p:cNvSpPr/>
           <p:nvPr/>
         </p:nvSpPr>
@@ -9958,7 +10548,7 @@
       </p:sp>
       <p:sp>
         <p:nvSpPr>
-          <p:cNvPr id="15" name="Text 13"/>
+          <p:cNvPr id="17" name="Text 14"/>
           <p:cNvSpPr txBox="1"/>
           <p:nvPr/>
         </p:nvSpPr>
@@ -9997,7 +10587,7 @@
       </p:sp>
       <p:sp>
         <p:nvSpPr>
-          <p:cNvPr id="16" name="Text 14"/>
+          <p:cNvPr id="18" name="Text 15"/>
           <p:cNvSpPr txBox="1"/>
           <p:nvPr/>
         </p:nvSpPr>
@@ -10053,7 +10643,7 @@
       </p:sp>
       <p:sp>
         <p:nvSpPr>
-          <p:cNvPr id="17" name="Shape 15"/>
+          <p:cNvPr id="19" name="Shape 16"/>
           <p:cNvSpPr/>
           <p:nvPr/>
         </p:nvSpPr>
@@ -10073,7 +10663,7 @@
       </p:sp>
       <p:sp>
         <p:nvSpPr>
-          <p:cNvPr id="18" name="Text 16"/>
+          <p:cNvPr id="20" name="Text 17"/>
           <p:cNvSpPr txBox="1"/>
           <p:nvPr/>
         </p:nvSpPr>
@@ -10112,7 +10702,7 @@
       </p:sp>
       <p:sp>
         <p:nvSpPr>
-          <p:cNvPr id="19" name="Text 17"/>
+          <p:cNvPr id="21" name="Text 18"/>
           <p:cNvSpPr txBox="1"/>
           <p:nvPr/>
         </p:nvSpPr>
@@ -10168,7 +10758,7 @@
       </p:sp>
       <p:sp>
         <p:nvSpPr>
-          <p:cNvPr id="20" name="Shape 18"/>
+          <p:cNvPr id="22" name="Shape 19"/>
           <p:cNvSpPr/>
           <p:nvPr/>
         </p:nvSpPr>
@@ -10195,7 +10785,7 @@
       </p:sp>
       <p:sp>
         <p:nvSpPr>
-          <p:cNvPr id="21" name="Shape 19"/>
+          <p:cNvPr id="23" name="Shape 20"/>
           <p:cNvSpPr/>
           <p:nvPr/>
         </p:nvSpPr>
@@ -10215,7 +10805,7 @@
       </p:sp>
       <p:sp>
         <p:nvSpPr>
-          <p:cNvPr id="22" name="Text 20"/>
+          <p:cNvPr id="24" name="Text 21"/>
           <p:cNvSpPr txBox="1"/>
           <p:nvPr/>
         </p:nvSpPr>
@@ -10254,7 +10844,7 @@
       </p:sp>
       <p:sp>
         <p:nvSpPr>
-          <p:cNvPr id="23" name="Text 21"/>
+          <p:cNvPr id="25" name="Text 22"/>
           <p:cNvSpPr txBox="1"/>
           <p:nvPr/>
         </p:nvSpPr>
@@ -10336,7 +10926,7 @@
       </p:sp>
       <p:sp>
         <p:nvSpPr>
-          <p:cNvPr id="24" name="Shape 22"/>
+          <p:cNvPr id="26" name="Shape 23"/>
           <p:cNvSpPr/>
           <p:nvPr/>
         </p:nvSpPr>
@@ -10363,7 +10953,7 @@
       </p:sp>
       <p:sp>
         <p:nvSpPr>
-          <p:cNvPr id="25" name="Shape 23"/>
+          <p:cNvPr id="27" name="Shape 24"/>
           <p:cNvSpPr/>
           <p:nvPr/>
         </p:nvSpPr>
@@ -10383,7 +10973,7 @@
       </p:sp>
       <p:sp>
         <p:nvSpPr>
-          <p:cNvPr id="26" name="Text 24"/>
+          <p:cNvPr id="28" name="Text 25"/>
           <p:cNvSpPr txBox="1"/>
           <p:nvPr/>
         </p:nvSpPr>
@@ -10422,7 +11012,7 @@
       </p:sp>
       <p:sp>
         <p:nvSpPr>
-          <p:cNvPr id="27" name="Text 25"/>
+          <p:cNvPr id="29" name="Text 26"/>
           <p:cNvSpPr txBox="1"/>
           <p:nvPr/>
         </p:nvSpPr>
@@ -10484,7 +11074,7 @@
       </p:sp>
       <p:sp>
         <p:nvSpPr>
-          <p:cNvPr id="28" name="Shape 26"/>
+          <p:cNvPr id="30" name="Shape 27"/>
           <p:cNvSpPr/>
           <p:nvPr/>
         </p:nvSpPr>
@@ -10511,7 +11101,7 @@
       </p:sp>
       <p:sp>
         <p:nvSpPr>
-          <p:cNvPr id="29" name="Shape 27"/>
+          <p:cNvPr id="31" name="Shape 28"/>
           <p:cNvSpPr/>
           <p:nvPr/>
         </p:nvSpPr>
@@ -10531,7 +11121,7 @@
       </p:sp>
       <p:sp>
         <p:nvSpPr>
-          <p:cNvPr id="30" name="Text 28"/>
+          <p:cNvPr id="32" name="Text 29"/>
           <p:cNvSpPr txBox="1"/>
           <p:nvPr/>
         </p:nvSpPr>
@@ -10570,7 +11160,7 @@
       </p:sp>
       <p:sp>
         <p:nvSpPr>
-          <p:cNvPr id="31" name="Text 29"/>
+          <p:cNvPr id="33" name="Text 30"/>
           <p:cNvSpPr txBox="1"/>
           <p:nvPr/>
         </p:nvSpPr>
@@ -10662,9 +11252,72 @@
           <a:chExt cx="0" cy="0"/>
         </a:xfrm>
       </p:grpSpPr>
-      <p:sp>
-        <p:nvSpPr>
-          <p:cNvPr id="2" name="Text 0"/>
+      <p:pic>
+        <p:nvPicPr>
+          <p:cNvPr id="2" name="Image 0" descr="/sessions/compassionate-sweet-heisenberg/mnt/dev-aspath-life-main/tools/assets/logo-deck.png">    </p:cNvPr>
+          <p:cNvPicPr>
+            <a:picLocks noChangeAspect="1"/>
+          </p:cNvPicPr>
+          <p:nvPr/>
+        </p:nvPicPr>
+        <p:blipFill>
+          <a:blip r:embed="rId1"/>
+          <a:stretch>
+            <a:fillRect/>
+          </a:stretch>
+        </p:blipFill>
+        <p:spPr>
+          <a:xfrm>
+            <a:off x="11458173" y="109728"/>
+            <a:ext cx="209571" cy="256032"/>
+          </a:xfrm>
+          <a:prstGeom prst="rect">
+            <a:avLst/>
+          </a:prstGeom>
+        </p:spPr>
+      </p:pic>
+      <p:sp>
+        <p:nvSpPr>
+          <p:cNvPr id="3" name="Text 0"/>
+          <p:cNvSpPr txBox="1"/>
+          <p:nvPr/>
+        </p:nvSpPr>
+        <p:spPr>
+          <a:xfrm>
+            <a:off x="8623533" y="128016"/>
+            <a:ext cx="2743200" cy="237744"/>
+          </a:xfrm>
+          <a:prstGeom prst="rect">
+            <a:avLst/>
+          </a:prstGeom>
+          <a:noFill/>
+          <a:ln/>
+        </p:spPr>
+        <p:txBody>
+          <a:bodyPr wrap="square" lIns="0" tIns="0" rIns="0" bIns="0" rtlCol="0" anchor="ctr"/>
+          <a:lstStyle/>
+          <a:p>
+            <a:pPr algn="r" indent="0" marL="0">
+              <a:buNone/>
+            </a:pPr>
+            <a:r>
+              <a:rPr lang="en-US" sz="750" dirty="0">
+                <a:solidFill>
+                  <a:srgbClr val="97A9AF"/>
+                </a:solidFill>
+                <a:latin typeface="Meiryo" pitchFamily="34" charset="0"/>
+                <a:ea typeface="Meiryo" pitchFamily="34" charset="-122"/>
+                <a:cs typeface="Meiryo" pitchFamily="34" charset="-120"/>
+              </a:rPr>
+              <a:t>鹿児島のパーキンソン病専門トレーニングスタジオ</a:t>
+            </a:r>
+            <a:endParaRPr lang="en-US" sz="750" dirty="0"/>
+          </a:p>
+        </p:txBody>
+      </p:sp>
+      <p:sp>
+        <p:nvSpPr>
+          <p:cNvPr id="4" name="Text 1"/>
           <p:cNvSpPr txBox="1"/>
           <p:nvPr/>
         </p:nvSpPr>
@@ -10703,7 +11356,7 @@
       </p:sp>
       <p:sp>
         <p:nvSpPr>
-          <p:cNvPr id="3" name="Text 1"/>
+          <p:cNvPr id="5" name="Text 2"/>
           <p:cNvSpPr txBox="1"/>
           <p:nvPr/>
         </p:nvSpPr>
@@ -10742,7 +11395,7 @@
       </p:sp>
       <p:sp>
         <p:nvSpPr>
-          <p:cNvPr id="4" name="Text 2"/>
+          <p:cNvPr id="6" name="Text 3"/>
           <p:cNvSpPr txBox="1"/>
           <p:nvPr/>
         </p:nvSpPr>
@@ -10781,7 +11434,7 @@
       </p:sp>
       <p:sp>
         <p:nvSpPr>
-          <p:cNvPr id="5" name="Shape 3"/>
+          <p:cNvPr id="7" name="Shape 4"/>
           <p:cNvSpPr/>
           <p:nvPr/>
         </p:nvSpPr>
@@ -10803,7 +11456,7 @@
       </p:sp>
       <p:sp>
         <p:nvSpPr>
-          <p:cNvPr id="6" name="Shape 4"/>
+          <p:cNvPr id="8" name="Shape 5"/>
           <p:cNvSpPr/>
           <p:nvPr/>
         </p:nvSpPr>
@@ -10830,7 +11483,7 @@
       </p:sp>
       <p:sp>
         <p:nvSpPr>
-          <p:cNvPr id="7" name="Text 5"/>
+          <p:cNvPr id="9" name="Text 6"/>
           <p:cNvSpPr txBox="1"/>
           <p:nvPr/>
         </p:nvSpPr>
@@ -10869,7 +11522,7 @@
       </p:sp>
       <p:sp>
         <p:nvSpPr>
-          <p:cNvPr id="8" name="Shape 6"/>
+          <p:cNvPr id="10" name="Shape 7"/>
           <p:cNvSpPr/>
           <p:nvPr/>
         </p:nvSpPr>
@@ -10896,7 +11549,7 @@
       </p:sp>
       <p:sp>
         <p:nvSpPr>
-          <p:cNvPr id="9" name="Text 7"/>
+          <p:cNvPr id="11" name="Text 8"/>
           <p:cNvSpPr txBox="1"/>
           <p:nvPr/>
         </p:nvSpPr>
@@ -10935,7 +11588,7 @@
       </p:sp>
       <p:sp>
         <p:nvSpPr>
-          <p:cNvPr id="10" name="Shape 8"/>
+          <p:cNvPr id="12" name="Shape 9"/>
           <p:cNvSpPr/>
           <p:nvPr/>
         </p:nvSpPr>
@@ -10962,7 +11615,7 @@
       </p:sp>
       <p:sp>
         <p:nvSpPr>
-          <p:cNvPr id="11" name="Text 9"/>
+          <p:cNvPr id="13" name="Text 10"/>
           <p:cNvSpPr txBox="1"/>
           <p:nvPr/>
         </p:nvSpPr>
@@ -11001,7 +11654,7 @@
       </p:sp>
       <p:sp>
         <p:nvSpPr>
-          <p:cNvPr id="12" name="Shape 10"/>
+          <p:cNvPr id="14" name="Shape 11"/>
           <p:cNvSpPr/>
           <p:nvPr/>
         </p:nvSpPr>
@@ -11028,7 +11681,7 @@
       </p:sp>
       <p:sp>
         <p:nvSpPr>
-          <p:cNvPr id="13" name="Text 11"/>
+          <p:cNvPr id="15" name="Text 12"/>
           <p:cNvSpPr txBox="1"/>
           <p:nvPr/>
         </p:nvSpPr>
@@ -11067,7 +11720,7 @@
       </p:sp>
       <p:sp>
         <p:nvSpPr>
-          <p:cNvPr id="14" name="Shape 12"/>
+          <p:cNvPr id="16" name="Shape 13"/>
           <p:cNvSpPr/>
           <p:nvPr/>
         </p:nvSpPr>
@@ -11094,7 +11747,7 @@
       </p:sp>
       <p:sp>
         <p:nvSpPr>
-          <p:cNvPr id="15" name="Text 13"/>
+          <p:cNvPr id="17" name="Text 14"/>
           <p:cNvSpPr txBox="1"/>
           <p:nvPr/>
         </p:nvSpPr>
@@ -11133,7 +11786,7 @@
       </p:sp>
       <p:sp>
         <p:nvSpPr>
-          <p:cNvPr id="16" name="Text 14"/>
+          <p:cNvPr id="18" name="Text 15"/>
           <p:cNvSpPr txBox="1"/>
           <p:nvPr/>
         </p:nvSpPr>
@@ -11172,7 +11825,7 @@
       </p:sp>
       <p:sp>
         <p:nvSpPr>
-          <p:cNvPr id="17" name="Text 15"/>
+          <p:cNvPr id="19" name="Text 16"/>
           <p:cNvSpPr txBox="1"/>
           <p:nvPr/>
         </p:nvSpPr>
@@ -11211,7 +11864,7 @@
       </p:sp>
       <p:sp>
         <p:nvSpPr>
-          <p:cNvPr id="18" name="Text 16"/>
+          <p:cNvPr id="20" name="Text 17"/>
           <p:cNvSpPr txBox="1"/>
           <p:nvPr/>
         </p:nvSpPr>
@@ -11250,7 +11903,7 @@
       </p:sp>
       <p:sp>
         <p:nvSpPr>
-          <p:cNvPr id="19" name="Text 17"/>
+          <p:cNvPr id="21" name="Text 18"/>
           <p:cNvSpPr txBox="1"/>
           <p:nvPr/>
         </p:nvSpPr>
@@ -11352,7 +12005,7 @@
       </p:sp>
       <p:sp>
         <p:nvSpPr>
-          <p:cNvPr id="20" name="Shape 18"/>
+          <p:cNvPr id="22" name="Shape 19"/>
           <p:cNvSpPr/>
           <p:nvPr/>
         </p:nvSpPr>
@@ -11377,7 +12030,7 @@
       </p:sp>
       <p:sp>
         <p:nvSpPr>
-          <p:cNvPr id="21" name="Text 19"/>
+          <p:cNvPr id="23" name="Text 20"/>
           <p:cNvSpPr txBox="1"/>
           <p:nvPr/>
         </p:nvSpPr>
@@ -11416,7 +12069,7 @@
       </p:sp>
       <p:sp>
         <p:nvSpPr>
-          <p:cNvPr id="22" name="Shape 20"/>
+          <p:cNvPr id="24" name="Shape 21"/>
           <p:cNvSpPr/>
           <p:nvPr/>
         </p:nvSpPr>
@@ -11441,7 +12094,7 @@
       </p:sp>
       <p:sp>
         <p:nvSpPr>
-          <p:cNvPr id="23" name="Text 21"/>
+          <p:cNvPr id="25" name="Text 22"/>
           <p:cNvSpPr txBox="1"/>
           <p:nvPr/>
         </p:nvSpPr>
@@ -11480,7 +12133,7 @@
       </p:sp>
       <p:sp>
         <p:nvSpPr>
-          <p:cNvPr id="24" name="Shape 22"/>
+          <p:cNvPr id="26" name="Shape 23"/>
           <p:cNvSpPr/>
           <p:nvPr/>
         </p:nvSpPr>
@@ -11507,7 +12160,7 @@
       </p:sp>
       <p:sp>
         <p:nvSpPr>
-          <p:cNvPr id="25" name="Shape 23"/>
+          <p:cNvPr id="27" name="Shape 24"/>
           <p:cNvSpPr/>
           <p:nvPr/>
         </p:nvSpPr>
@@ -11527,7 +12180,7 @@
       </p:sp>
       <p:sp>
         <p:nvSpPr>
-          <p:cNvPr id="26" name="Text 24"/>
+          <p:cNvPr id="28" name="Text 25"/>
           <p:cNvSpPr txBox="1"/>
           <p:nvPr/>
         </p:nvSpPr>
@@ -11566,7 +12219,7 @@
       </p:sp>
       <p:sp>
         <p:nvSpPr>
-          <p:cNvPr id="27" name="Text 25"/>
+          <p:cNvPr id="29" name="Text 26"/>
           <p:cNvSpPr txBox="1"/>
           <p:nvPr/>
         </p:nvSpPr>
@@ -11628,7 +12281,7 @@
       </p:sp>
       <p:sp>
         <p:nvSpPr>
-          <p:cNvPr id="28" name="Shape 26"/>
+          <p:cNvPr id="30" name="Shape 27"/>
           <p:cNvSpPr/>
           <p:nvPr/>
         </p:nvSpPr>
@@ -11655,7 +12308,7 @@
       </p:sp>
       <p:sp>
         <p:nvSpPr>
-          <p:cNvPr id="29" name="Shape 27"/>
+          <p:cNvPr id="31" name="Shape 28"/>
           <p:cNvSpPr/>
           <p:nvPr/>
         </p:nvSpPr>
@@ -11675,7 +12328,7 @@
       </p:sp>
       <p:sp>
         <p:nvSpPr>
-          <p:cNvPr id="30" name="Text 28"/>
+          <p:cNvPr id="32" name="Text 29"/>
           <p:cNvSpPr txBox="1"/>
           <p:nvPr/>
         </p:nvSpPr>
@@ -11714,7 +12367,7 @@
       </p:sp>
       <p:sp>
         <p:nvSpPr>
-          <p:cNvPr id="31" name="Text 29"/>
+          <p:cNvPr id="33" name="Text 30"/>
           <p:cNvSpPr txBox="1"/>
           <p:nvPr/>
         </p:nvSpPr>
@@ -11776,7 +12429,7 @@
       </p:sp>
       <p:sp>
         <p:nvSpPr>
-          <p:cNvPr id="32" name="Shape 30"/>
+          <p:cNvPr id="34" name="Shape 31"/>
           <p:cNvSpPr/>
           <p:nvPr/>
         </p:nvSpPr>
@@ -11803,7 +12456,7 @@
       </p:sp>
       <p:sp>
         <p:nvSpPr>
-          <p:cNvPr id="33" name="Shape 31"/>
+          <p:cNvPr id="35" name="Shape 32"/>
           <p:cNvSpPr/>
           <p:nvPr/>
         </p:nvSpPr>
@@ -11823,7 +12476,7 @@
       </p:sp>
       <p:sp>
         <p:nvSpPr>
-          <p:cNvPr id="34" name="Text 32"/>
+          <p:cNvPr id="36" name="Text 33"/>
           <p:cNvSpPr txBox="1"/>
           <p:nvPr/>
         </p:nvSpPr>
@@ -11862,7 +12515,7 @@
       </p:sp>
       <p:sp>
         <p:nvSpPr>
-          <p:cNvPr id="35" name="Text 33"/>
+          <p:cNvPr id="37" name="Text 34"/>
           <p:cNvSpPr txBox="1"/>
           <p:nvPr/>
         </p:nvSpPr>
@@ -11954,9 +12607,72 @@
           <a:chExt cx="0" cy="0"/>
         </a:xfrm>
       </p:grpSpPr>
-      <p:sp>
-        <p:nvSpPr>
-          <p:cNvPr id="2" name="Text 0"/>
+      <p:pic>
+        <p:nvPicPr>
+          <p:cNvPr id="2" name="Image 0" descr="/sessions/compassionate-sweet-heisenberg/mnt/dev-aspath-life-main/tools/assets/logo-deck.png">    </p:cNvPr>
+          <p:cNvPicPr>
+            <a:picLocks noChangeAspect="1"/>
+          </p:cNvPicPr>
+          <p:nvPr/>
+        </p:nvPicPr>
+        <p:blipFill>
+          <a:blip r:embed="rId1"/>
+          <a:stretch>
+            <a:fillRect/>
+          </a:stretch>
+        </p:blipFill>
+        <p:spPr>
+          <a:xfrm>
+            <a:off x="11458173" y="109728"/>
+            <a:ext cx="209571" cy="256032"/>
+          </a:xfrm>
+          <a:prstGeom prst="rect">
+            <a:avLst/>
+          </a:prstGeom>
+        </p:spPr>
+      </p:pic>
+      <p:sp>
+        <p:nvSpPr>
+          <p:cNvPr id="3" name="Text 0"/>
+          <p:cNvSpPr txBox="1"/>
+          <p:nvPr/>
+        </p:nvSpPr>
+        <p:spPr>
+          <a:xfrm>
+            <a:off x="8623533" y="128016"/>
+            <a:ext cx="2743200" cy="237744"/>
+          </a:xfrm>
+          <a:prstGeom prst="rect">
+            <a:avLst/>
+          </a:prstGeom>
+          <a:noFill/>
+          <a:ln/>
+        </p:spPr>
+        <p:txBody>
+          <a:bodyPr wrap="square" lIns="0" tIns="0" rIns="0" bIns="0" rtlCol="0" anchor="ctr"/>
+          <a:lstStyle/>
+          <a:p>
+            <a:pPr algn="r" indent="0" marL="0">
+              <a:buNone/>
+            </a:pPr>
+            <a:r>
+              <a:rPr lang="en-US" sz="750" dirty="0">
+                <a:solidFill>
+                  <a:srgbClr val="97A9AF"/>
+                </a:solidFill>
+                <a:latin typeface="Meiryo" pitchFamily="34" charset="0"/>
+                <a:ea typeface="Meiryo" pitchFamily="34" charset="-122"/>
+                <a:cs typeface="Meiryo" pitchFamily="34" charset="-120"/>
+              </a:rPr>
+              <a:t>鹿児島のパーキンソン病専門トレーニングスタジオ</a:t>
+            </a:r>
+            <a:endParaRPr lang="en-US" sz="750" dirty="0"/>
+          </a:p>
+        </p:txBody>
+      </p:sp>
+      <p:sp>
+        <p:nvSpPr>
+          <p:cNvPr id="4" name="Text 1"/>
           <p:cNvSpPr txBox="1"/>
           <p:nvPr/>
         </p:nvSpPr>
@@ -11995,7 +12711,7 @@
       </p:sp>
       <p:sp>
         <p:nvSpPr>
-          <p:cNvPr id="3" name="Text 1"/>
+          <p:cNvPr id="5" name="Text 2"/>
           <p:cNvSpPr txBox="1"/>
           <p:nvPr/>
         </p:nvSpPr>
@@ -12034,7 +12750,7 @@
       </p:sp>
       <p:sp>
         <p:nvSpPr>
-          <p:cNvPr id="4" name="Text 2"/>
+          <p:cNvPr id="6" name="Text 3"/>
           <p:cNvSpPr txBox="1"/>
           <p:nvPr/>
         </p:nvSpPr>
@@ -12073,7 +12789,7 @@
       </p:sp>
       <p:sp>
         <p:nvSpPr>
-          <p:cNvPr id="5" name="Shape 3"/>
+          <p:cNvPr id="7" name="Shape 4"/>
           <p:cNvSpPr/>
           <p:nvPr/>
         </p:nvSpPr>
@@ -12100,7 +12816,7 @@
       </p:sp>
       <p:sp>
         <p:nvSpPr>
-          <p:cNvPr id="6" name="Shape 4"/>
+          <p:cNvPr id="8" name="Shape 5"/>
           <p:cNvSpPr/>
           <p:nvPr/>
         </p:nvSpPr>
@@ -12120,7 +12836,7 @@
       </p:sp>
       <p:sp>
         <p:nvSpPr>
-          <p:cNvPr id="7" name="Text 5"/>
+          <p:cNvPr id="9" name="Text 6"/>
           <p:cNvSpPr txBox="1"/>
           <p:nvPr/>
         </p:nvSpPr>
@@ -12159,7 +12875,7 @@
       </p:sp>
       <p:sp>
         <p:nvSpPr>
-          <p:cNvPr id="8" name="Text 6"/>
+          <p:cNvPr id="10" name="Text 7"/>
           <p:cNvSpPr txBox="1"/>
           <p:nvPr/>
         </p:nvSpPr>
@@ -12198,7 +12914,7 @@
       </p:sp>
       <p:sp>
         <p:nvSpPr>
-          <p:cNvPr id="9" name="Text 7"/>
+          <p:cNvPr id="11" name="Text 8"/>
           <p:cNvSpPr txBox="1"/>
           <p:nvPr/>
         </p:nvSpPr>
@@ -12240,7 +12956,7 @@
       </p:sp>
       <p:sp>
         <p:nvSpPr>
-          <p:cNvPr id="10" name="Shape 8"/>
+          <p:cNvPr id="12" name="Shape 9"/>
           <p:cNvSpPr/>
           <p:nvPr/>
         </p:nvSpPr>
@@ -12267,7 +12983,7 @@
       </p:sp>
       <p:sp>
         <p:nvSpPr>
-          <p:cNvPr id="11" name="Shape 9"/>
+          <p:cNvPr id="13" name="Shape 10"/>
           <p:cNvSpPr/>
           <p:nvPr/>
         </p:nvSpPr>
@@ -12287,7 +13003,7 @@
       </p:sp>
       <p:sp>
         <p:nvSpPr>
-          <p:cNvPr id="12" name="Text 10"/>
+          <p:cNvPr id="14" name="Text 11"/>
           <p:cNvSpPr txBox="1"/>
           <p:nvPr/>
         </p:nvSpPr>
@@ -12326,7 +13042,7 @@
       </p:sp>
       <p:sp>
         <p:nvSpPr>
-          <p:cNvPr id="13" name="Text 11"/>
+          <p:cNvPr id="15" name="Text 12"/>
           <p:cNvSpPr txBox="1"/>
           <p:nvPr/>
         </p:nvSpPr>
@@ -12365,7 +13081,7 @@
       </p:sp>
       <p:sp>
         <p:nvSpPr>
-          <p:cNvPr id="14" name="Text 12"/>
+          <p:cNvPr id="16" name="Text 13"/>
           <p:cNvSpPr txBox="1"/>
           <p:nvPr/>
         </p:nvSpPr>
@@ -12407,7 +13123,7 @@
       </p:sp>
       <p:sp>
         <p:nvSpPr>
-          <p:cNvPr id="15" name="Shape 13"/>
+          <p:cNvPr id="17" name="Shape 14"/>
           <p:cNvSpPr/>
           <p:nvPr/>
         </p:nvSpPr>
@@ -12434,7 +13150,7 @@
       </p:sp>
       <p:sp>
         <p:nvSpPr>
-          <p:cNvPr id="16" name="Shape 14"/>
+          <p:cNvPr id="18" name="Shape 15"/>
           <p:cNvSpPr/>
           <p:nvPr/>
         </p:nvSpPr>
@@ -12454,7 +13170,7 @@
       </p:sp>
       <p:sp>
         <p:nvSpPr>
-          <p:cNvPr id="17" name="Text 15"/>
+          <p:cNvPr id="19" name="Text 16"/>
           <p:cNvSpPr txBox="1"/>
           <p:nvPr/>
         </p:nvSpPr>
@@ -12493,7 +13209,7 @@
       </p:sp>
       <p:sp>
         <p:nvSpPr>
-          <p:cNvPr id="18" name="Text 16"/>
+          <p:cNvPr id="20" name="Text 17"/>
           <p:cNvSpPr txBox="1"/>
           <p:nvPr/>
         </p:nvSpPr>
@@ -12532,7 +13248,7 @@
       </p:sp>
       <p:sp>
         <p:nvSpPr>
-          <p:cNvPr id="19" name="Text 17"/>
+          <p:cNvPr id="21" name="Text 18"/>
           <p:cNvSpPr txBox="1"/>
           <p:nvPr/>
         </p:nvSpPr>
@@ -12574,7 +13290,7 @@
       </p:sp>
       <p:sp>
         <p:nvSpPr>
-          <p:cNvPr id="20" name="Shape 18"/>
+          <p:cNvPr id="22" name="Shape 19"/>
           <p:cNvSpPr/>
           <p:nvPr/>
         </p:nvSpPr>
@@ -12601,7 +13317,7 @@
       </p:sp>
       <p:sp>
         <p:nvSpPr>
-          <p:cNvPr id="21" name="Shape 19"/>
+          <p:cNvPr id="23" name="Shape 20"/>
           <p:cNvSpPr/>
           <p:nvPr/>
         </p:nvSpPr>
@@ -12621,7 +13337,7 @@
       </p:sp>
       <p:sp>
         <p:nvSpPr>
-          <p:cNvPr id="22" name="Text 20"/>
+          <p:cNvPr id="24" name="Text 21"/>
           <p:cNvSpPr txBox="1"/>
           <p:nvPr/>
         </p:nvSpPr>
@@ -12660,7 +13376,7 @@
       </p:sp>
       <p:sp>
         <p:nvSpPr>
-          <p:cNvPr id="23" name="Text 21"/>
+          <p:cNvPr id="25" name="Text 22"/>
           <p:cNvSpPr txBox="1"/>
           <p:nvPr/>
         </p:nvSpPr>
@@ -12699,7 +13415,7 @@
       </p:sp>
       <p:sp>
         <p:nvSpPr>
-          <p:cNvPr id="24" name="Text 22"/>
+          <p:cNvPr id="26" name="Text 23"/>
           <p:cNvSpPr txBox="1"/>
           <p:nvPr/>
         </p:nvSpPr>
@@ -12741,7 +13457,7 @@
       </p:sp>
       <p:sp>
         <p:nvSpPr>
-          <p:cNvPr id="25" name="Shape 23"/>
+          <p:cNvPr id="27" name="Shape 24"/>
           <p:cNvSpPr/>
           <p:nvPr/>
         </p:nvSpPr>
@@ -12768,7 +13484,7 @@
       </p:sp>
       <p:sp>
         <p:nvSpPr>
-          <p:cNvPr id="26" name="Shape 24"/>
+          <p:cNvPr id="28" name="Shape 25"/>
           <p:cNvSpPr/>
           <p:nvPr/>
         </p:nvSpPr>
@@ -12788,7 +13504,7 @@
       </p:sp>
       <p:sp>
         <p:nvSpPr>
-          <p:cNvPr id="27" name="Text 25"/>
+          <p:cNvPr id="29" name="Text 26"/>
           <p:cNvSpPr txBox="1"/>
           <p:nvPr/>
         </p:nvSpPr>
@@ -12827,7 +13543,7 @@
       </p:sp>
       <p:sp>
         <p:nvSpPr>
-          <p:cNvPr id="28" name="Text 26"/>
+          <p:cNvPr id="30" name="Text 27"/>
           <p:cNvSpPr txBox="1"/>
           <p:nvPr/>
         </p:nvSpPr>
@@ -12866,7 +13582,7 @@
       </p:sp>
       <p:sp>
         <p:nvSpPr>
-          <p:cNvPr id="29" name="Text 27"/>
+          <p:cNvPr id="31" name="Text 28"/>
           <p:cNvSpPr txBox="1"/>
           <p:nvPr/>
         </p:nvSpPr>
@@ -12908,7 +13624,7 @@
       </p:sp>
       <p:sp>
         <p:nvSpPr>
-          <p:cNvPr id="30" name="Shape 28"/>
+          <p:cNvPr id="32" name="Shape 29"/>
           <p:cNvSpPr/>
           <p:nvPr/>
         </p:nvSpPr>
@@ -12935,7 +13651,7 @@
       </p:sp>
       <p:sp>
         <p:nvSpPr>
-          <p:cNvPr id="31" name="Shape 29"/>
+          <p:cNvPr id="33" name="Shape 30"/>
           <p:cNvSpPr/>
           <p:nvPr/>
         </p:nvSpPr>
@@ -12955,7 +13671,7 @@
       </p:sp>
       <p:sp>
         <p:nvSpPr>
-          <p:cNvPr id="32" name="Text 30"/>
+          <p:cNvPr id="34" name="Text 31"/>
           <p:cNvSpPr txBox="1"/>
           <p:nvPr/>
         </p:nvSpPr>
@@ -12994,7 +13710,7 @@
       </p:sp>
       <p:sp>
         <p:nvSpPr>
-          <p:cNvPr id="33" name="Text 31"/>
+          <p:cNvPr id="35" name="Text 32"/>
           <p:cNvSpPr txBox="1"/>
           <p:nvPr/>
         </p:nvSpPr>
@@ -13033,7 +13749,7 @@
       </p:sp>
       <p:sp>
         <p:nvSpPr>
-          <p:cNvPr id="34" name="Text 32"/>
+          <p:cNvPr id="36" name="Text 33"/>
           <p:cNvSpPr txBox="1"/>
           <p:nvPr/>
         </p:nvSpPr>
@@ -13075,7 +13791,7 @@
       </p:sp>
       <p:sp>
         <p:nvSpPr>
-          <p:cNvPr id="35" name="Shape 33"/>
+          <p:cNvPr id="37" name="Shape 34"/>
           <p:cNvSpPr/>
           <p:nvPr/>
         </p:nvSpPr>
@@ -13102,7 +13818,7 @@
       </p:sp>
       <p:sp>
         <p:nvSpPr>
-          <p:cNvPr id="36" name="Shape 34"/>
+          <p:cNvPr id="38" name="Shape 35"/>
           <p:cNvSpPr/>
           <p:nvPr/>
         </p:nvSpPr>
@@ -13122,7 +13838,7 @@
       </p:sp>
       <p:sp>
         <p:nvSpPr>
-          <p:cNvPr id="37" name="Text 35"/>
+          <p:cNvPr id="39" name="Text 36"/>
           <p:cNvSpPr txBox="1"/>
           <p:nvPr/>
         </p:nvSpPr>
@@ -13161,7 +13877,7 @@
       </p:sp>
       <p:sp>
         <p:nvSpPr>
-          <p:cNvPr id="38" name="Text 36"/>
+          <p:cNvPr id="40" name="Text 37"/>
           <p:cNvSpPr txBox="1"/>
           <p:nvPr/>
         </p:nvSpPr>
@@ -13200,7 +13916,7 @@
       </p:sp>
       <p:sp>
         <p:nvSpPr>
-          <p:cNvPr id="39" name="Text 37"/>
+          <p:cNvPr id="41" name="Text 38"/>
           <p:cNvSpPr txBox="1"/>
           <p:nvPr/>
         </p:nvSpPr>
@@ -13242,7 +13958,7 @@
       </p:sp>
       <p:sp>
         <p:nvSpPr>
-          <p:cNvPr id="40" name="Shape 38"/>
+          <p:cNvPr id="42" name="Shape 39"/>
           <p:cNvSpPr/>
           <p:nvPr/>
         </p:nvSpPr>
@@ -13269,7 +13985,7 @@
       </p:sp>
       <p:sp>
         <p:nvSpPr>
-          <p:cNvPr id="41" name="Shape 39"/>
+          <p:cNvPr id="43" name="Shape 40"/>
           <p:cNvSpPr/>
           <p:nvPr/>
         </p:nvSpPr>
@@ -13289,7 +14005,7 @@
       </p:sp>
       <p:sp>
         <p:nvSpPr>
-          <p:cNvPr id="42" name="Text 40"/>
+          <p:cNvPr id="44" name="Text 41"/>
           <p:cNvSpPr txBox="1"/>
           <p:nvPr/>
         </p:nvSpPr>
@@ -13328,7 +14044,7 @@
       </p:sp>
       <p:sp>
         <p:nvSpPr>
-          <p:cNvPr id="43" name="Text 41"/>
+          <p:cNvPr id="45" name="Text 42"/>
           <p:cNvSpPr txBox="1"/>
           <p:nvPr/>
         </p:nvSpPr>
@@ -13367,7 +14083,7 @@
       </p:sp>
       <p:sp>
         <p:nvSpPr>
-          <p:cNvPr id="44" name="Text 42"/>
+          <p:cNvPr id="46" name="Text 43"/>
           <p:cNvSpPr txBox="1"/>
           <p:nvPr/>
         </p:nvSpPr>
@@ -13409,7 +14125,7 @@
       </p:sp>
       <p:sp>
         <p:nvSpPr>
-          <p:cNvPr id="45" name="Shape 43"/>
+          <p:cNvPr id="47" name="Shape 44"/>
           <p:cNvSpPr/>
           <p:nvPr/>
         </p:nvSpPr>
@@ -13436,7 +14152,7 @@
       </p:sp>
       <p:sp>
         <p:nvSpPr>
-          <p:cNvPr id="46" name="Shape 44"/>
+          <p:cNvPr id="48" name="Shape 45"/>
           <p:cNvSpPr/>
           <p:nvPr/>
         </p:nvSpPr>
@@ -13456,7 +14172,7 @@
       </p:sp>
       <p:sp>
         <p:nvSpPr>
-          <p:cNvPr id="47" name="Text 45"/>
+          <p:cNvPr id="49" name="Text 46"/>
           <p:cNvSpPr txBox="1"/>
           <p:nvPr/>
         </p:nvSpPr>
@@ -13495,7 +14211,7 @@
       </p:sp>
       <p:sp>
         <p:nvSpPr>
-          <p:cNvPr id="48" name="Text 46"/>
+          <p:cNvPr id="50" name="Text 47"/>
           <p:cNvSpPr txBox="1"/>
           <p:nvPr/>
         </p:nvSpPr>
@@ -13534,7 +14250,7 @@
       </p:sp>
       <p:sp>
         <p:nvSpPr>
-          <p:cNvPr id="49" name="Text 47"/>
+          <p:cNvPr id="51" name="Text 48"/>
           <p:cNvSpPr txBox="1"/>
           <p:nvPr/>
         </p:nvSpPr>
@@ -13576,7 +14292,7 @@
       </p:sp>
       <p:sp>
         <p:nvSpPr>
-          <p:cNvPr id="50" name="Shape 48"/>
+          <p:cNvPr id="52" name="Shape 49"/>
           <p:cNvSpPr/>
           <p:nvPr/>
         </p:nvSpPr>
@@ -13603,7 +14319,7 @@
       </p:sp>
       <p:sp>
         <p:nvSpPr>
-          <p:cNvPr id="51" name="Shape 49"/>
+          <p:cNvPr id="53" name="Shape 50"/>
           <p:cNvSpPr/>
           <p:nvPr/>
         </p:nvSpPr>
@@ -13623,7 +14339,7 @@
       </p:sp>
       <p:sp>
         <p:nvSpPr>
-          <p:cNvPr id="52" name="Text 50"/>
+          <p:cNvPr id="54" name="Text 51"/>
           <p:cNvSpPr txBox="1"/>
           <p:nvPr/>
         </p:nvSpPr>
@@ -13662,7 +14378,7 @@
       </p:sp>
       <p:sp>
         <p:nvSpPr>
-          <p:cNvPr id="53" name="Text 51"/>
+          <p:cNvPr id="55" name="Text 52"/>
           <p:cNvSpPr txBox="1"/>
           <p:nvPr/>
         </p:nvSpPr>
@@ -13754,9 +14470,72 @@
           <a:chExt cx="0" cy="0"/>
         </a:xfrm>
       </p:grpSpPr>
-      <p:sp>
-        <p:nvSpPr>
-          <p:cNvPr id="2" name="Text 0"/>
+      <p:pic>
+        <p:nvPicPr>
+          <p:cNvPr id="2" name="Image 0" descr="/sessions/compassionate-sweet-heisenberg/mnt/dev-aspath-life-main/tools/assets/logo-deck.png">    </p:cNvPr>
+          <p:cNvPicPr>
+            <a:picLocks noChangeAspect="1"/>
+          </p:cNvPicPr>
+          <p:nvPr/>
+        </p:nvPicPr>
+        <p:blipFill>
+          <a:blip r:embed="rId1"/>
+          <a:stretch>
+            <a:fillRect/>
+          </a:stretch>
+        </p:blipFill>
+        <p:spPr>
+          <a:xfrm>
+            <a:off x="11458173" y="109728"/>
+            <a:ext cx="209571" cy="256032"/>
+          </a:xfrm>
+          <a:prstGeom prst="rect">
+            <a:avLst/>
+          </a:prstGeom>
+        </p:spPr>
+      </p:pic>
+      <p:sp>
+        <p:nvSpPr>
+          <p:cNvPr id="3" name="Text 0"/>
+          <p:cNvSpPr txBox="1"/>
+          <p:nvPr/>
+        </p:nvSpPr>
+        <p:spPr>
+          <a:xfrm>
+            <a:off x="8623533" y="128016"/>
+            <a:ext cx="2743200" cy="237744"/>
+          </a:xfrm>
+          <a:prstGeom prst="rect">
+            <a:avLst/>
+          </a:prstGeom>
+          <a:noFill/>
+          <a:ln/>
+        </p:spPr>
+        <p:txBody>
+          <a:bodyPr wrap="square" lIns="0" tIns="0" rIns="0" bIns="0" rtlCol="0" anchor="ctr"/>
+          <a:lstStyle/>
+          <a:p>
+            <a:pPr algn="r" indent="0" marL="0">
+              <a:buNone/>
+            </a:pPr>
+            <a:r>
+              <a:rPr lang="en-US" sz="750" dirty="0">
+                <a:solidFill>
+                  <a:srgbClr val="97A9AF"/>
+                </a:solidFill>
+                <a:latin typeface="Meiryo" pitchFamily="34" charset="0"/>
+                <a:ea typeface="Meiryo" pitchFamily="34" charset="-122"/>
+                <a:cs typeface="Meiryo" pitchFamily="34" charset="-120"/>
+              </a:rPr>
+              <a:t>鹿児島のパーキンソン病専門トレーニングスタジオ</a:t>
+            </a:r>
+            <a:endParaRPr lang="en-US" sz="750" dirty="0"/>
+          </a:p>
+        </p:txBody>
+      </p:sp>
+      <p:sp>
+        <p:nvSpPr>
+          <p:cNvPr id="4" name="Text 1"/>
           <p:cNvSpPr txBox="1"/>
           <p:nvPr/>
         </p:nvSpPr>
@@ -13795,7 +14574,7 @@
       </p:sp>
       <p:sp>
         <p:nvSpPr>
-          <p:cNvPr id="3" name="Text 1"/>
+          <p:cNvPr id="5" name="Text 2"/>
           <p:cNvSpPr txBox="1"/>
           <p:nvPr/>
         </p:nvSpPr>
@@ -13834,7 +14613,7 @@
       </p:sp>
       <p:sp>
         <p:nvSpPr>
-          <p:cNvPr id="4" name="Text 2"/>
+          <p:cNvPr id="6" name="Text 3"/>
           <p:cNvSpPr txBox="1"/>
           <p:nvPr/>
         </p:nvSpPr>
@@ -13873,7 +14652,7 @@
       </p:sp>
       <p:sp>
         <p:nvSpPr>
-          <p:cNvPr id="5" name="Shape 3"/>
+          <p:cNvPr id="7" name="Shape 4"/>
           <p:cNvSpPr/>
           <p:nvPr/>
         </p:nvSpPr>
@@ -13900,7 +14679,7 @@
       </p:sp>
       <p:sp>
         <p:nvSpPr>
-          <p:cNvPr id="6" name="Shape 4"/>
+          <p:cNvPr id="8" name="Shape 5"/>
           <p:cNvSpPr/>
           <p:nvPr/>
         </p:nvSpPr>
@@ -13920,7 +14699,7 @@
       </p:sp>
       <p:sp>
         <p:nvSpPr>
-          <p:cNvPr id="7" name="Text 5"/>
+          <p:cNvPr id="9" name="Text 6"/>
           <p:cNvSpPr txBox="1"/>
           <p:nvPr/>
         </p:nvSpPr>
@@ -13959,7 +14738,7 @@
       </p:sp>
       <p:sp>
         <p:nvSpPr>
-          <p:cNvPr id="8" name="Text 6"/>
+          <p:cNvPr id="10" name="Text 7"/>
           <p:cNvSpPr txBox="1"/>
           <p:nvPr/>
         </p:nvSpPr>
@@ -13998,7 +14777,7 @@
       </p:sp>
       <p:sp>
         <p:nvSpPr>
-          <p:cNvPr id="9" name="Text 7"/>
+          <p:cNvPr id="11" name="Text 8"/>
           <p:cNvSpPr txBox="1"/>
           <p:nvPr/>
         </p:nvSpPr>
@@ -14040,7 +14819,7 @@
       </p:sp>
       <p:sp>
         <p:nvSpPr>
-          <p:cNvPr id="10" name="Shape 8"/>
+          <p:cNvPr id="12" name="Shape 9"/>
           <p:cNvSpPr/>
           <p:nvPr/>
         </p:nvSpPr>
@@ -14067,7 +14846,7 @@
       </p:sp>
       <p:sp>
         <p:nvSpPr>
-          <p:cNvPr id="11" name="Shape 9"/>
+          <p:cNvPr id="13" name="Shape 10"/>
           <p:cNvSpPr/>
           <p:nvPr/>
         </p:nvSpPr>
@@ -14087,7 +14866,7 @@
       </p:sp>
       <p:sp>
         <p:nvSpPr>
-          <p:cNvPr id="12" name="Text 10"/>
+          <p:cNvPr id="14" name="Text 11"/>
           <p:cNvSpPr txBox="1"/>
           <p:nvPr/>
         </p:nvSpPr>
@@ -14126,7 +14905,7 @@
       </p:sp>
       <p:sp>
         <p:nvSpPr>
-          <p:cNvPr id="13" name="Text 11"/>
+          <p:cNvPr id="15" name="Text 12"/>
           <p:cNvSpPr txBox="1"/>
           <p:nvPr/>
         </p:nvSpPr>
@@ -14165,7 +14944,7 @@
       </p:sp>
       <p:sp>
         <p:nvSpPr>
-          <p:cNvPr id="14" name="Text 12"/>
+          <p:cNvPr id="16" name="Text 13"/>
           <p:cNvSpPr txBox="1"/>
           <p:nvPr/>
         </p:nvSpPr>
@@ -14207,7 +14986,7 @@
       </p:sp>
       <p:sp>
         <p:nvSpPr>
-          <p:cNvPr id="15" name="Shape 13"/>
+          <p:cNvPr id="17" name="Shape 14"/>
           <p:cNvSpPr/>
           <p:nvPr/>
         </p:nvSpPr>
@@ -14234,7 +15013,7 @@
       </p:sp>
       <p:sp>
         <p:nvSpPr>
-          <p:cNvPr id="16" name="Shape 14"/>
+          <p:cNvPr id="18" name="Shape 15"/>
           <p:cNvSpPr/>
           <p:nvPr/>
         </p:nvSpPr>
@@ -14254,7 +15033,7 @@
       </p:sp>
       <p:sp>
         <p:nvSpPr>
-          <p:cNvPr id="17" name="Text 15"/>
+          <p:cNvPr id="19" name="Text 16"/>
           <p:cNvSpPr txBox="1"/>
           <p:nvPr/>
         </p:nvSpPr>
@@ -14293,7 +15072,7 @@
       </p:sp>
       <p:sp>
         <p:nvSpPr>
-          <p:cNvPr id="18" name="Text 16"/>
+          <p:cNvPr id="20" name="Text 17"/>
           <p:cNvSpPr txBox="1"/>
           <p:nvPr/>
         </p:nvSpPr>
@@ -14332,7 +15111,7 @@
       </p:sp>
       <p:sp>
         <p:nvSpPr>
-          <p:cNvPr id="19" name="Text 17"/>
+          <p:cNvPr id="21" name="Text 18"/>
           <p:cNvSpPr txBox="1"/>
           <p:nvPr/>
         </p:nvSpPr>
@@ -14374,7 +15153,7 @@
       </p:sp>
       <p:sp>
         <p:nvSpPr>
-          <p:cNvPr id="20" name="Shape 18"/>
+          <p:cNvPr id="22" name="Shape 19"/>
           <p:cNvSpPr/>
           <p:nvPr/>
         </p:nvSpPr>
@@ -14401,7 +15180,7 @@
       </p:sp>
       <p:sp>
         <p:nvSpPr>
-          <p:cNvPr id="21" name="Shape 19"/>
+          <p:cNvPr id="23" name="Shape 20"/>
           <p:cNvSpPr/>
           <p:nvPr/>
         </p:nvSpPr>
@@ -14421,7 +15200,7 @@
       </p:sp>
       <p:sp>
         <p:nvSpPr>
-          <p:cNvPr id="22" name="Text 20"/>
+          <p:cNvPr id="24" name="Text 21"/>
           <p:cNvSpPr txBox="1"/>
           <p:nvPr/>
         </p:nvSpPr>
@@ -14460,7 +15239,7 @@
       </p:sp>
       <p:sp>
         <p:nvSpPr>
-          <p:cNvPr id="23" name="Text 21"/>
+          <p:cNvPr id="25" name="Text 22"/>
           <p:cNvSpPr txBox="1"/>
           <p:nvPr/>
         </p:nvSpPr>
@@ -14499,7 +15278,7 @@
       </p:sp>
       <p:sp>
         <p:nvSpPr>
-          <p:cNvPr id="24" name="Text 22"/>
+          <p:cNvPr id="26" name="Text 23"/>
           <p:cNvSpPr txBox="1"/>
           <p:nvPr/>
         </p:nvSpPr>
@@ -14541,7 +15320,7 @@
       </p:sp>
       <p:sp>
         <p:nvSpPr>
-          <p:cNvPr id="25" name="Shape 23"/>
+          <p:cNvPr id="27" name="Shape 24"/>
           <p:cNvSpPr/>
           <p:nvPr/>
         </p:nvSpPr>
@@ -14568,7 +15347,7 @@
       </p:sp>
       <p:sp>
         <p:nvSpPr>
-          <p:cNvPr id="26" name="Shape 24"/>
+          <p:cNvPr id="28" name="Shape 25"/>
           <p:cNvSpPr/>
           <p:nvPr/>
         </p:nvSpPr>
@@ -14588,7 +15367,7 @@
       </p:sp>
       <p:sp>
         <p:nvSpPr>
-          <p:cNvPr id="27" name="Text 25"/>
+          <p:cNvPr id="29" name="Text 26"/>
           <p:cNvSpPr txBox="1"/>
           <p:nvPr/>
         </p:nvSpPr>
@@ -14627,7 +15406,7 @@
       </p:sp>
       <p:sp>
         <p:nvSpPr>
-          <p:cNvPr id="28" name="Text 26"/>
+          <p:cNvPr id="30" name="Text 27"/>
           <p:cNvSpPr txBox="1"/>
           <p:nvPr/>
         </p:nvSpPr>
@@ -14719,9 +15498,72 @@
           <a:chExt cx="0" cy="0"/>
         </a:xfrm>
       </p:grpSpPr>
-      <p:sp>
-        <p:nvSpPr>
-          <p:cNvPr id="2" name="Text 0"/>
+      <p:pic>
+        <p:nvPicPr>
+          <p:cNvPr id="2" name="Image 0" descr="/sessions/compassionate-sweet-heisenberg/mnt/dev-aspath-life-main/tools/assets/logo-deck.png">    </p:cNvPr>
+          <p:cNvPicPr>
+            <a:picLocks noChangeAspect="1"/>
+          </p:cNvPicPr>
+          <p:nvPr/>
+        </p:nvPicPr>
+        <p:blipFill>
+          <a:blip r:embed="rId1"/>
+          <a:stretch>
+            <a:fillRect/>
+          </a:stretch>
+        </p:blipFill>
+        <p:spPr>
+          <a:xfrm>
+            <a:off x="11458173" y="109728"/>
+            <a:ext cx="209571" cy="256032"/>
+          </a:xfrm>
+          <a:prstGeom prst="rect">
+            <a:avLst/>
+          </a:prstGeom>
+        </p:spPr>
+      </p:pic>
+      <p:sp>
+        <p:nvSpPr>
+          <p:cNvPr id="3" name="Text 0"/>
+          <p:cNvSpPr txBox="1"/>
+          <p:nvPr/>
+        </p:nvSpPr>
+        <p:spPr>
+          <a:xfrm>
+            <a:off x="8623533" y="128016"/>
+            <a:ext cx="2743200" cy="237744"/>
+          </a:xfrm>
+          <a:prstGeom prst="rect">
+            <a:avLst/>
+          </a:prstGeom>
+          <a:noFill/>
+          <a:ln/>
+        </p:spPr>
+        <p:txBody>
+          <a:bodyPr wrap="square" lIns="0" tIns="0" rIns="0" bIns="0" rtlCol="0" anchor="ctr"/>
+          <a:lstStyle/>
+          <a:p>
+            <a:pPr algn="r" indent="0" marL="0">
+              <a:buNone/>
+            </a:pPr>
+            <a:r>
+              <a:rPr lang="en-US" sz="750" dirty="0">
+                <a:solidFill>
+                  <a:srgbClr val="97A9AF"/>
+                </a:solidFill>
+                <a:latin typeface="Meiryo" pitchFamily="34" charset="0"/>
+                <a:ea typeface="Meiryo" pitchFamily="34" charset="-122"/>
+                <a:cs typeface="Meiryo" pitchFamily="34" charset="-120"/>
+              </a:rPr>
+              <a:t>鹿児島のパーキンソン病専門トレーニングスタジオ</a:t>
+            </a:r>
+            <a:endParaRPr lang="en-US" sz="750" dirty="0"/>
+          </a:p>
+        </p:txBody>
+      </p:sp>
+      <p:sp>
+        <p:nvSpPr>
+          <p:cNvPr id="4" name="Text 1"/>
           <p:cNvSpPr txBox="1"/>
           <p:nvPr/>
         </p:nvSpPr>
@@ -14760,7 +15602,7 @@
       </p:sp>
       <p:sp>
         <p:nvSpPr>
-          <p:cNvPr id="3" name="Text 1"/>
+          <p:cNvPr id="5" name="Text 2"/>
           <p:cNvSpPr txBox="1"/>
           <p:nvPr/>
         </p:nvSpPr>
@@ -14799,7 +15641,7 @@
       </p:sp>
       <p:sp>
         <p:nvSpPr>
-          <p:cNvPr id="4" name="Text 2"/>
+          <p:cNvPr id="6" name="Text 3"/>
           <p:cNvSpPr txBox="1"/>
           <p:nvPr/>
         </p:nvSpPr>
@@ -14838,7 +15680,7 @@
       </p:sp>
       <p:sp>
         <p:nvSpPr>
-          <p:cNvPr id="5" name="Shape 3"/>
+          <p:cNvPr id="7" name="Shape 4"/>
           <p:cNvSpPr/>
           <p:nvPr/>
         </p:nvSpPr>
@@ -14865,7 +15707,7 @@
       </p:sp>
       <p:sp>
         <p:nvSpPr>
-          <p:cNvPr id="6" name="Shape 4"/>
+          <p:cNvPr id="8" name="Shape 5"/>
           <p:cNvSpPr/>
           <p:nvPr/>
         </p:nvSpPr>
@@ -14885,7 +15727,7 @@
       </p:sp>
       <p:sp>
         <p:nvSpPr>
-          <p:cNvPr id="7" name="Text 5"/>
+          <p:cNvPr id="9" name="Text 6"/>
           <p:cNvSpPr txBox="1"/>
           <p:nvPr/>
         </p:nvSpPr>
@@ -14924,7 +15766,7 @@
       </p:sp>
       <p:sp>
         <p:nvSpPr>
-          <p:cNvPr id="8" name="Text 6"/>
+          <p:cNvPr id="10" name="Text 7"/>
           <p:cNvSpPr txBox="1"/>
           <p:nvPr/>
         </p:nvSpPr>
@@ -14963,7 +15805,7 @@
       </p:sp>
       <p:sp>
         <p:nvSpPr>
-          <p:cNvPr id="9" name="Text 7"/>
+          <p:cNvPr id="11" name="Text 8"/>
           <p:cNvSpPr txBox="1"/>
           <p:nvPr/>
         </p:nvSpPr>
@@ -15005,7 +15847,7 @@
       </p:sp>
       <p:sp>
         <p:nvSpPr>
-          <p:cNvPr id="10" name="Shape 8"/>
+          <p:cNvPr id="12" name="Shape 9"/>
           <p:cNvSpPr/>
           <p:nvPr/>
         </p:nvSpPr>
@@ -15032,7 +15874,7 @@
       </p:sp>
       <p:sp>
         <p:nvSpPr>
-          <p:cNvPr id="11" name="Shape 9"/>
+          <p:cNvPr id="13" name="Shape 10"/>
           <p:cNvSpPr/>
           <p:nvPr/>
         </p:nvSpPr>
@@ -15052,7 +15894,7 @@
       </p:sp>
       <p:sp>
         <p:nvSpPr>
-          <p:cNvPr id="12" name="Text 10"/>
+          <p:cNvPr id="14" name="Text 11"/>
           <p:cNvSpPr txBox="1"/>
           <p:nvPr/>
         </p:nvSpPr>
@@ -15091,7 +15933,7 @@
       </p:sp>
       <p:sp>
         <p:nvSpPr>
-          <p:cNvPr id="13" name="Text 11"/>
+          <p:cNvPr id="15" name="Text 12"/>
           <p:cNvSpPr txBox="1"/>
           <p:nvPr/>
         </p:nvSpPr>
@@ -15130,7 +15972,7 @@
       </p:sp>
       <p:sp>
         <p:nvSpPr>
-          <p:cNvPr id="14" name="Text 12"/>
+          <p:cNvPr id="16" name="Text 13"/>
           <p:cNvSpPr txBox="1"/>
           <p:nvPr/>
         </p:nvSpPr>
@@ -15172,7 +16014,7 @@
       </p:sp>
       <p:sp>
         <p:nvSpPr>
-          <p:cNvPr id="15" name="Shape 13"/>
+          <p:cNvPr id="17" name="Shape 14"/>
           <p:cNvSpPr/>
           <p:nvPr/>
         </p:nvSpPr>
@@ -15199,7 +16041,7 @@
       </p:sp>
       <p:sp>
         <p:nvSpPr>
-          <p:cNvPr id="16" name="Shape 14"/>
+          <p:cNvPr id="18" name="Shape 15"/>
           <p:cNvSpPr/>
           <p:nvPr/>
         </p:nvSpPr>
@@ -15219,7 +16061,7 @@
       </p:sp>
       <p:sp>
         <p:nvSpPr>
-          <p:cNvPr id="17" name="Text 15"/>
+          <p:cNvPr id="19" name="Text 16"/>
           <p:cNvSpPr txBox="1"/>
           <p:nvPr/>
         </p:nvSpPr>
@@ -15258,7 +16100,7 @@
       </p:sp>
       <p:sp>
         <p:nvSpPr>
-          <p:cNvPr id="18" name="Text 16"/>
+          <p:cNvPr id="20" name="Text 17"/>
           <p:cNvSpPr txBox="1"/>
           <p:nvPr/>
         </p:nvSpPr>
@@ -15297,7 +16139,7 @@
       </p:sp>
       <p:sp>
         <p:nvSpPr>
-          <p:cNvPr id="19" name="Text 17"/>
+          <p:cNvPr id="21" name="Text 18"/>
           <p:cNvSpPr txBox="1"/>
           <p:nvPr/>
         </p:nvSpPr>
@@ -15339,7 +16181,7 @@
       </p:sp>
       <p:sp>
         <p:nvSpPr>
-          <p:cNvPr id="20" name="Shape 18"/>
+          <p:cNvPr id="22" name="Shape 19"/>
           <p:cNvSpPr/>
           <p:nvPr/>
         </p:nvSpPr>
@@ -15366,7 +16208,7 @@
       </p:sp>
       <p:sp>
         <p:nvSpPr>
-          <p:cNvPr id="21" name="Shape 19"/>
+          <p:cNvPr id="23" name="Shape 20"/>
           <p:cNvSpPr/>
           <p:nvPr/>
         </p:nvSpPr>
@@ -15386,7 +16228,7 @@
       </p:sp>
       <p:sp>
         <p:nvSpPr>
-          <p:cNvPr id="22" name="Text 20"/>
+          <p:cNvPr id="24" name="Text 21"/>
           <p:cNvSpPr txBox="1"/>
           <p:nvPr/>
         </p:nvSpPr>
@@ -15425,7 +16267,7 @@
       </p:sp>
       <p:sp>
         <p:nvSpPr>
-          <p:cNvPr id="23" name="Text 21"/>
+          <p:cNvPr id="25" name="Text 22"/>
           <p:cNvSpPr txBox="1"/>
           <p:nvPr/>
         </p:nvSpPr>
@@ -15464,7 +16306,7 @@
       </p:sp>
       <p:sp>
         <p:nvSpPr>
-          <p:cNvPr id="24" name="Text 22"/>
+          <p:cNvPr id="26" name="Text 23"/>
           <p:cNvSpPr txBox="1"/>
           <p:nvPr/>
         </p:nvSpPr>
@@ -15506,7 +16348,7 @@
       </p:sp>
       <p:sp>
         <p:nvSpPr>
-          <p:cNvPr id="25" name="Shape 23"/>
+          <p:cNvPr id="27" name="Shape 24"/>
           <p:cNvSpPr/>
           <p:nvPr/>
         </p:nvSpPr>
@@ -15533,7 +16375,7 @@
       </p:sp>
       <p:sp>
         <p:nvSpPr>
-          <p:cNvPr id="26" name="Shape 24"/>
+          <p:cNvPr id="28" name="Shape 25"/>
           <p:cNvSpPr/>
           <p:nvPr/>
         </p:nvSpPr>
@@ -15553,7 +16395,7 @@
       </p:sp>
       <p:sp>
         <p:nvSpPr>
-          <p:cNvPr id="27" name="Text 25"/>
+          <p:cNvPr id="29" name="Text 26"/>
           <p:cNvSpPr txBox="1"/>
           <p:nvPr/>
         </p:nvSpPr>
@@ -15592,7 +16434,7 @@
       </p:sp>
       <p:sp>
         <p:nvSpPr>
-          <p:cNvPr id="28" name="Text 26"/>
+          <p:cNvPr id="30" name="Text 27"/>
           <p:cNvSpPr txBox="1"/>
           <p:nvPr/>
         </p:nvSpPr>
@@ -15631,7 +16473,7 @@
       </p:sp>
       <p:sp>
         <p:nvSpPr>
-          <p:cNvPr id="29" name="Text 27"/>
+          <p:cNvPr id="31" name="Text 28"/>
           <p:cNvSpPr txBox="1"/>
           <p:nvPr/>
         </p:nvSpPr>
@@ -15673,7 +16515,7 @@
       </p:sp>
       <p:sp>
         <p:nvSpPr>
-          <p:cNvPr id="30" name="Shape 28"/>
+          <p:cNvPr id="32" name="Shape 29"/>
           <p:cNvSpPr/>
           <p:nvPr/>
         </p:nvSpPr>
@@ -15700,7 +16542,7 @@
       </p:sp>
       <p:sp>
         <p:nvSpPr>
-          <p:cNvPr id="31" name="Shape 29"/>
+          <p:cNvPr id="33" name="Shape 30"/>
           <p:cNvSpPr/>
           <p:nvPr/>
         </p:nvSpPr>
@@ -15720,7 +16562,7 @@
       </p:sp>
       <p:sp>
         <p:nvSpPr>
-          <p:cNvPr id="32" name="Text 30"/>
+          <p:cNvPr id="34" name="Text 31"/>
           <p:cNvSpPr txBox="1"/>
           <p:nvPr/>
         </p:nvSpPr>
@@ -15759,7 +16601,7 @@
       </p:sp>
       <p:sp>
         <p:nvSpPr>
-          <p:cNvPr id="33" name="Text 31"/>
+          <p:cNvPr id="35" name="Text 32"/>
           <p:cNvSpPr txBox="1"/>
           <p:nvPr/>
         </p:nvSpPr>
@@ -15851,9 +16693,72 @@
           <a:chExt cx="0" cy="0"/>
         </a:xfrm>
       </p:grpSpPr>
-      <p:sp>
-        <p:nvSpPr>
-          <p:cNvPr id="2" name="Text 0"/>
+      <p:pic>
+        <p:nvPicPr>
+          <p:cNvPr id="2" name="Image 0" descr="/sessions/compassionate-sweet-heisenberg/mnt/dev-aspath-life-main/tools/assets/logo-deck.png">    </p:cNvPr>
+          <p:cNvPicPr>
+            <a:picLocks noChangeAspect="1"/>
+          </p:cNvPicPr>
+          <p:nvPr/>
+        </p:nvPicPr>
+        <p:blipFill>
+          <a:blip r:embed="rId1"/>
+          <a:stretch>
+            <a:fillRect/>
+          </a:stretch>
+        </p:blipFill>
+        <p:spPr>
+          <a:xfrm>
+            <a:off x="11458173" y="109728"/>
+            <a:ext cx="209571" cy="256032"/>
+          </a:xfrm>
+          <a:prstGeom prst="rect">
+            <a:avLst/>
+          </a:prstGeom>
+        </p:spPr>
+      </p:pic>
+      <p:sp>
+        <p:nvSpPr>
+          <p:cNvPr id="3" name="Text 0"/>
+          <p:cNvSpPr txBox="1"/>
+          <p:nvPr/>
+        </p:nvSpPr>
+        <p:spPr>
+          <a:xfrm>
+            <a:off x="8623533" y="128016"/>
+            <a:ext cx="2743200" cy="237744"/>
+          </a:xfrm>
+          <a:prstGeom prst="rect">
+            <a:avLst/>
+          </a:prstGeom>
+          <a:noFill/>
+          <a:ln/>
+        </p:spPr>
+        <p:txBody>
+          <a:bodyPr wrap="square" lIns="0" tIns="0" rIns="0" bIns="0" rtlCol="0" anchor="ctr"/>
+          <a:lstStyle/>
+          <a:p>
+            <a:pPr algn="r" indent="0" marL="0">
+              <a:buNone/>
+            </a:pPr>
+            <a:r>
+              <a:rPr lang="en-US" sz="750" dirty="0">
+                <a:solidFill>
+                  <a:srgbClr val="97A9AF"/>
+                </a:solidFill>
+                <a:latin typeface="Meiryo" pitchFamily="34" charset="0"/>
+                <a:ea typeface="Meiryo" pitchFamily="34" charset="-122"/>
+                <a:cs typeface="Meiryo" pitchFamily="34" charset="-120"/>
+              </a:rPr>
+              <a:t>鹿児島のパーキンソン病専門トレーニングスタジオ</a:t>
+            </a:r>
+            <a:endParaRPr lang="en-US" sz="750" dirty="0"/>
+          </a:p>
+        </p:txBody>
+      </p:sp>
+      <p:sp>
+        <p:nvSpPr>
+          <p:cNvPr id="4" name="Text 1"/>
           <p:cNvSpPr txBox="1"/>
           <p:nvPr/>
         </p:nvSpPr>
@@ -15892,7 +16797,7 @@
       </p:sp>
       <p:sp>
         <p:nvSpPr>
-          <p:cNvPr id="3" name="Text 1"/>
+          <p:cNvPr id="5" name="Text 2"/>
           <p:cNvSpPr txBox="1"/>
           <p:nvPr/>
         </p:nvSpPr>
@@ -15931,7 +16836,7 @@
       </p:sp>
       <p:sp>
         <p:nvSpPr>
-          <p:cNvPr id="4" name="Text 2"/>
+          <p:cNvPr id="6" name="Text 3"/>
           <p:cNvSpPr txBox="1"/>
           <p:nvPr/>
         </p:nvSpPr>
@@ -15970,7 +16875,7 @@
       </p:sp>
       <p:sp>
         <p:nvSpPr>
-          <p:cNvPr id="5" name="Shape 3"/>
+          <p:cNvPr id="7" name="Shape 4"/>
           <p:cNvSpPr/>
           <p:nvPr/>
         </p:nvSpPr>
@@ -15997,7 +16902,7 @@
       </p:sp>
       <p:sp>
         <p:nvSpPr>
-          <p:cNvPr id="6" name="Shape 4"/>
+          <p:cNvPr id="8" name="Shape 5"/>
           <p:cNvSpPr/>
           <p:nvPr/>
         </p:nvSpPr>
@@ -16017,7 +16922,7 @@
       </p:sp>
       <p:sp>
         <p:nvSpPr>
-          <p:cNvPr id="7" name="Text 5"/>
+          <p:cNvPr id="9" name="Text 6"/>
           <p:cNvSpPr txBox="1"/>
           <p:nvPr/>
         </p:nvSpPr>
@@ -16056,7 +16961,7 @@
       </p:sp>
       <p:sp>
         <p:nvSpPr>
-          <p:cNvPr id="8" name="Text 6"/>
+          <p:cNvPr id="10" name="Text 7"/>
           <p:cNvSpPr txBox="1"/>
           <p:nvPr/>
         </p:nvSpPr>
@@ -16095,7 +17000,7 @@
       </p:sp>
       <p:sp>
         <p:nvSpPr>
-          <p:cNvPr id="9" name="Text 7"/>
+          <p:cNvPr id="11" name="Text 8"/>
           <p:cNvSpPr txBox="1"/>
           <p:nvPr/>
         </p:nvSpPr>
@@ -16137,7 +17042,7 @@
       </p:sp>
       <p:sp>
         <p:nvSpPr>
-          <p:cNvPr id="10" name="Shape 8"/>
+          <p:cNvPr id="12" name="Shape 9"/>
           <p:cNvSpPr/>
           <p:nvPr/>
         </p:nvSpPr>
@@ -16164,7 +17069,7 @@
       </p:sp>
       <p:sp>
         <p:nvSpPr>
-          <p:cNvPr id="11" name="Shape 9"/>
+          <p:cNvPr id="13" name="Shape 10"/>
           <p:cNvSpPr/>
           <p:nvPr/>
         </p:nvSpPr>
@@ -16184,7 +17089,7 @@
       </p:sp>
       <p:sp>
         <p:nvSpPr>
-          <p:cNvPr id="12" name="Text 10"/>
+          <p:cNvPr id="14" name="Text 11"/>
           <p:cNvSpPr txBox="1"/>
           <p:nvPr/>
         </p:nvSpPr>
@@ -16223,7 +17128,7 @@
       </p:sp>
       <p:sp>
         <p:nvSpPr>
-          <p:cNvPr id="13" name="Text 11"/>
+          <p:cNvPr id="15" name="Text 12"/>
           <p:cNvSpPr txBox="1"/>
           <p:nvPr/>
         </p:nvSpPr>
@@ -16262,7 +17167,7 @@
       </p:sp>
       <p:sp>
         <p:nvSpPr>
-          <p:cNvPr id="14" name="Text 12"/>
+          <p:cNvPr id="16" name="Text 13"/>
           <p:cNvSpPr txBox="1"/>
           <p:nvPr/>
         </p:nvSpPr>
@@ -16304,7 +17209,7 @@
       </p:sp>
       <p:sp>
         <p:nvSpPr>
-          <p:cNvPr id="15" name="Shape 13"/>
+          <p:cNvPr id="17" name="Shape 14"/>
           <p:cNvSpPr/>
           <p:nvPr/>
         </p:nvSpPr>
@@ -16331,7 +17236,7 @@
       </p:sp>
       <p:sp>
         <p:nvSpPr>
-          <p:cNvPr id="16" name="Shape 14"/>
+          <p:cNvPr id="18" name="Shape 15"/>
           <p:cNvSpPr/>
           <p:nvPr/>
         </p:nvSpPr>
@@ -16351,7 +17256,7 @@
       </p:sp>
       <p:sp>
         <p:nvSpPr>
-          <p:cNvPr id="17" name="Text 15"/>
+          <p:cNvPr id="19" name="Text 16"/>
           <p:cNvSpPr txBox="1"/>
           <p:nvPr/>
         </p:nvSpPr>
@@ -16390,7 +17295,7 @@
       </p:sp>
       <p:sp>
         <p:nvSpPr>
-          <p:cNvPr id="18" name="Text 16"/>
+          <p:cNvPr id="20" name="Text 17"/>
           <p:cNvSpPr txBox="1"/>
           <p:nvPr/>
         </p:nvSpPr>
@@ -16429,7 +17334,7 @@
       </p:sp>
       <p:sp>
         <p:nvSpPr>
-          <p:cNvPr id="19" name="Text 17"/>
+          <p:cNvPr id="21" name="Text 18"/>
           <p:cNvSpPr txBox="1"/>
           <p:nvPr/>
         </p:nvSpPr>
@@ -16471,7 +17376,7 @@
       </p:sp>
       <p:sp>
         <p:nvSpPr>
-          <p:cNvPr id="20" name="Shape 18"/>
+          <p:cNvPr id="22" name="Shape 19"/>
           <p:cNvSpPr/>
           <p:nvPr/>
         </p:nvSpPr>
@@ -16498,7 +17403,7 @@
       </p:sp>
       <p:sp>
         <p:nvSpPr>
-          <p:cNvPr id="21" name="Shape 19"/>
+          <p:cNvPr id="23" name="Shape 20"/>
           <p:cNvSpPr/>
           <p:nvPr/>
         </p:nvSpPr>
@@ -16518,7 +17423,7 @@
       </p:sp>
       <p:sp>
         <p:nvSpPr>
-          <p:cNvPr id="22" name="Text 20"/>
+          <p:cNvPr id="24" name="Text 21"/>
           <p:cNvSpPr txBox="1"/>
           <p:nvPr/>
         </p:nvSpPr>
@@ -16557,7 +17462,7 @@
       </p:sp>
       <p:sp>
         <p:nvSpPr>
-          <p:cNvPr id="23" name="Text 21"/>
+          <p:cNvPr id="25" name="Text 22"/>
           <p:cNvSpPr txBox="1"/>
           <p:nvPr/>
         </p:nvSpPr>
@@ -16596,7 +17501,7 @@
       </p:sp>
       <p:sp>
         <p:nvSpPr>
-          <p:cNvPr id="24" name="Text 22"/>
+          <p:cNvPr id="26" name="Text 23"/>
           <p:cNvSpPr txBox="1"/>
           <p:nvPr/>
         </p:nvSpPr>
@@ -16638,7 +17543,7 @@
       </p:sp>
       <p:sp>
         <p:nvSpPr>
-          <p:cNvPr id="25" name="Shape 23"/>
+          <p:cNvPr id="27" name="Shape 24"/>
           <p:cNvSpPr/>
           <p:nvPr/>
         </p:nvSpPr>
@@ -16665,7 +17570,7 @@
       </p:sp>
       <p:sp>
         <p:nvSpPr>
-          <p:cNvPr id="26" name="Shape 24"/>
+          <p:cNvPr id="28" name="Shape 25"/>
           <p:cNvSpPr/>
           <p:nvPr/>
         </p:nvSpPr>
@@ -16685,7 +17590,7 @@
       </p:sp>
       <p:sp>
         <p:nvSpPr>
-          <p:cNvPr id="27" name="Text 25"/>
+          <p:cNvPr id="29" name="Text 26"/>
           <p:cNvSpPr txBox="1"/>
           <p:nvPr/>
         </p:nvSpPr>
@@ -16724,7 +17629,7 @@
       </p:sp>
       <p:sp>
         <p:nvSpPr>
-          <p:cNvPr id="28" name="Text 26"/>
+          <p:cNvPr id="30" name="Text 27"/>
           <p:cNvSpPr txBox="1"/>
           <p:nvPr/>
         </p:nvSpPr>
@@ -16816,9 +17721,72 @@
           <a:chExt cx="0" cy="0"/>
         </a:xfrm>
       </p:grpSpPr>
-      <p:sp>
-        <p:nvSpPr>
-          <p:cNvPr id="2" name="Text 0"/>
+      <p:pic>
+        <p:nvPicPr>
+          <p:cNvPr id="2" name="Image 0" descr="/sessions/compassionate-sweet-heisenberg/mnt/dev-aspath-life-main/tools/assets/logo-deck.png">    </p:cNvPr>
+          <p:cNvPicPr>
+            <a:picLocks noChangeAspect="1"/>
+          </p:cNvPicPr>
+          <p:nvPr/>
+        </p:nvPicPr>
+        <p:blipFill>
+          <a:blip r:embed="rId1"/>
+          <a:stretch>
+            <a:fillRect/>
+          </a:stretch>
+        </p:blipFill>
+        <p:spPr>
+          <a:xfrm>
+            <a:off x="11458173" y="109728"/>
+            <a:ext cx="209571" cy="256032"/>
+          </a:xfrm>
+          <a:prstGeom prst="rect">
+            <a:avLst/>
+          </a:prstGeom>
+        </p:spPr>
+      </p:pic>
+      <p:sp>
+        <p:nvSpPr>
+          <p:cNvPr id="3" name="Text 0"/>
+          <p:cNvSpPr txBox="1"/>
+          <p:nvPr/>
+        </p:nvSpPr>
+        <p:spPr>
+          <a:xfrm>
+            <a:off x="8623533" y="128016"/>
+            <a:ext cx="2743200" cy="237744"/>
+          </a:xfrm>
+          <a:prstGeom prst="rect">
+            <a:avLst/>
+          </a:prstGeom>
+          <a:noFill/>
+          <a:ln/>
+        </p:spPr>
+        <p:txBody>
+          <a:bodyPr wrap="square" lIns="0" tIns="0" rIns="0" bIns="0" rtlCol="0" anchor="ctr"/>
+          <a:lstStyle/>
+          <a:p>
+            <a:pPr algn="r" indent="0" marL="0">
+              <a:buNone/>
+            </a:pPr>
+            <a:r>
+              <a:rPr lang="en-US" sz="750" dirty="0">
+                <a:solidFill>
+                  <a:srgbClr val="97A9AF"/>
+                </a:solidFill>
+                <a:latin typeface="Meiryo" pitchFamily="34" charset="0"/>
+                <a:ea typeface="Meiryo" pitchFamily="34" charset="-122"/>
+                <a:cs typeface="Meiryo" pitchFamily="34" charset="-120"/>
+              </a:rPr>
+              <a:t>鹿児島のパーキンソン病専門トレーニングスタジオ</a:t>
+            </a:r>
+            <a:endParaRPr lang="en-US" sz="750" dirty="0"/>
+          </a:p>
+        </p:txBody>
+      </p:sp>
+      <p:sp>
+        <p:nvSpPr>
+          <p:cNvPr id="4" name="Text 1"/>
           <p:cNvSpPr txBox="1"/>
           <p:nvPr/>
         </p:nvSpPr>
@@ -16857,7 +17825,7 @@
       </p:sp>
       <p:sp>
         <p:nvSpPr>
-          <p:cNvPr id="3" name="Text 1"/>
+          <p:cNvPr id="5" name="Text 2"/>
           <p:cNvSpPr txBox="1"/>
           <p:nvPr/>
         </p:nvSpPr>
@@ -16896,7 +17864,7 @@
       </p:sp>
       <p:sp>
         <p:nvSpPr>
-          <p:cNvPr id="4" name="Text 2"/>
+          <p:cNvPr id="6" name="Text 3"/>
           <p:cNvSpPr txBox="1"/>
           <p:nvPr/>
         </p:nvSpPr>
@@ -16935,7 +17903,7 @@
       </p:sp>
       <p:sp>
         <p:nvSpPr>
-          <p:cNvPr id="5" name="Shape 3"/>
+          <p:cNvPr id="7" name="Shape 4"/>
           <p:cNvSpPr/>
           <p:nvPr/>
         </p:nvSpPr>
@@ -16962,7 +17930,7 @@
       </p:sp>
       <p:sp>
         <p:nvSpPr>
-          <p:cNvPr id="6" name="Shape 4"/>
+          <p:cNvPr id="8" name="Shape 5"/>
           <p:cNvSpPr/>
           <p:nvPr/>
         </p:nvSpPr>
@@ -16982,7 +17950,7 @@
       </p:sp>
       <p:sp>
         <p:nvSpPr>
-          <p:cNvPr id="7" name="Text 5"/>
+          <p:cNvPr id="9" name="Text 6"/>
           <p:cNvSpPr txBox="1"/>
           <p:nvPr/>
         </p:nvSpPr>
@@ -17021,7 +17989,7 @@
       </p:sp>
       <p:sp>
         <p:nvSpPr>
-          <p:cNvPr id="8" name="Text 6"/>
+          <p:cNvPr id="10" name="Text 7"/>
           <p:cNvSpPr txBox="1"/>
           <p:nvPr/>
         </p:nvSpPr>
@@ -17060,7 +18028,7 @@
       </p:sp>
       <p:sp>
         <p:nvSpPr>
-          <p:cNvPr id="9" name="Text 7"/>
+          <p:cNvPr id="11" name="Text 8"/>
           <p:cNvSpPr txBox="1"/>
           <p:nvPr/>
         </p:nvSpPr>
@@ -17102,7 +18070,7 @@
       </p:sp>
       <p:sp>
         <p:nvSpPr>
-          <p:cNvPr id="10" name="Shape 8"/>
+          <p:cNvPr id="12" name="Shape 9"/>
           <p:cNvSpPr/>
           <p:nvPr/>
         </p:nvSpPr>
@@ -17129,7 +18097,7 @@
       </p:sp>
       <p:sp>
         <p:nvSpPr>
-          <p:cNvPr id="11" name="Shape 9"/>
+          <p:cNvPr id="13" name="Shape 10"/>
           <p:cNvSpPr/>
           <p:nvPr/>
         </p:nvSpPr>
@@ -17149,7 +18117,7 @@
       </p:sp>
       <p:sp>
         <p:nvSpPr>
-          <p:cNvPr id="12" name="Text 10"/>
+          <p:cNvPr id="14" name="Text 11"/>
           <p:cNvSpPr txBox="1"/>
           <p:nvPr/>
         </p:nvSpPr>
@@ -17188,7 +18156,7 @@
       </p:sp>
       <p:sp>
         <p:nvSpPr>
-          <p:cNvPr id="13" name="Text 11"/>
+          <p:cNvPr id="15" name="Text 12"/>
           <p:cNvSpPr txBox="1"/>
           <p:nvPr/>
         </p:nvSpPr>
@@ -17227,7 +18195,7 @@
       </p:sp>
       <p:sp>
         <p:nvSpPr>
-          <p:cNvPr id="14" name="Text 12"/>
+          <p:cNvPr id="16" name="Text 13"/>
           <p:cNvSpPr txBox="1"/>
           <p:nvPr/>
         </p:nvSpPr>
@@ -17269,7 +18237,7 @@
       </p:sp>
       <p:sp>
         <p:nvSpPr>
-          <p:cNvPr id="15" name="Shape 13"/>
+          <p:cNvPr id="17" name="Shape 14"/>
           <p:cNvSpPr/>
           <p:nvPr/>
         </p:nvSpPr>
@@ -17296,7 +18264,7 @@
       </p:sp>
       <p:sp>
         <p:nvSpPr>
-          <p:cNvPr id="16" name="Shape 14"/>
+          <p:cNvPr id="18" name="Shape 15"/>
           <p:cNvSpPr/>
           <p:nvPr/>
         </p:nvSpPr>
@@ -17316,7 +18284,7 @@
       </p:sp>
       <p:sp>
         <p:nvSpPr>
-          <p:cNvPr id="17" name="Text 15"/>
+          <p:cNvPr id="19" name="Text 16"/>
           <p:cNvSpPr txBox="1"/>
           <p:nvPr/>
         </p:nvSpPr>
@@ -17355,7 +18323,7 @@
       </p:sp>
       <p:sp>
         <p:nvSpPr>
-          <p:cNvPr id="18" name="Text 16"/>
+          <p:cNvPr id="20" name="Text 17"/>
           <p:cNvSpPr txBox="1"/>
           <p:nvPr/>
         </p:nvSpPr>
